--- a/08_Apresentacao_Final_Safe_Student.pptx
+++ b/08_Apresentacao_Final_Safe_Student.pptx
@@ -3285,7 +3285,7 @@
                 </a:solidFill>
                 <a:latin typeface="Aptos"/>
               </a:rPr>
-              <a:t>Revisão técnica V2.0 • requisitos verificáveis • UML/DER formal • MVP auditável</a:t>
+              <a:t>Requisitos verificáveis • UML consolidada • MVP acadêmico auditável</a:t>
             </a:r>
           </a:p>
         </p:txBody>
@@ -3558,7 +3558,7 @@
                 </a:solidFill>
                 <a:latin typeface="Aptos"/>
               </a:rPr>
-              <a:t>Como defender o Safe Student depois da revisão V2</a:t>
+              <a:t>Como defender o Safe Student diante da banca</a:t>
             </a:r>
           </a:p>
         </p:txBody>
@@ -4371,7 +4371,7 @@
                 </a:solidFill>
                 <a:latin typeface="Aptos"/>
               </a:rPr>
-              <a:t>V2.0: mais importante que “parecer completo” é conseguir provar cada afirmação diante da banca.</a:t>
+              <a:t>Mais importante que “parecer completo” é conseguir provar cada afirmação diante da banca.</a:t>
             </a:r>
           </a:p>
         </p:txBody>
@@ -6535,7 +6535,7 @@
                 </a:solidFill>
                 <a:latin typeface="Aptos"/>
               </a:rPr>
-              <a:t>Requisitos V2: verificáveis, rastreáveis e coerentes com o código</a:t>
+              <a:t>Requisitos verificáveis, rastreáveis e coerentes com o MVP</a:t>
             </a:r>
           </a:p>
         </p:txBody>
@@ -6736,7 +6736,7 @@
                 </a:solidFill>
                 <a:latin typeface="Aptos"/>
               </a:rPr>
-              <a:t>15 requisitos funcionais descrevem obrigações observáveis. Cada RF possui critério de aceite e prioridade.</a:t>
+              <a:t>11 requisitos funcionais descrevem obrigações observáveis. Cada RF possui critério de aceite e prioridade.</a:t>
             </a:r>
           </a:p>
         </p:txBody>
@@ -6894,7 +6894,7 @@
                 </a:solidFill>
                 <a:latin typeface="Aptos"/>
               </a:rPr>
-              <a:t>12 requisitos não funcionais indicam a forma de comprovação. Metas sem medição não são tratadas como atendidas.</a:t>
+              <a:t>8 requisitos não funcionais indicam a forma de comprovação. Metas sem medição não são tratadas como atendidas.</a:t>
             </a:r>
           </a:p>
         </p:txBody>
@@ -7167,7 +7167,7 @@
                 </a:solidFill>
                 <a:latin typeface="Aptos"/>
               </a:rPr>
-              <a:t>A V2 não mantém uma quantidade artificial de requisitos apenas para “encher” o documento. A contagem resulta do comportamento do MVP. Termos vagos como “seguro”, “rápido” ou “LGPD compliant” só aparecem quando existe critério ou evidência correspondente.</a:t>
+              <a:t>A especificação não mantém uma quantidade artificial de requisitos apenas para “encher” o documento. A contagem resulta do comportamento do MVP. Termos vagos como “seguro”, “rápido” ou “LGPD compliant” só aparecem quando existe critério ou evidência correspondente.</a:t>
             </a:r>
           </a:p>
         </p:txBody>
@@ -7202,7 +7202,7 @@
                 </a:solidFill>
                 <a:latin typeface="Aptos"/>
               </a:rPr>
-              <a:t>Referência: docs/ESPECIFICACAO_REQUISITOS_V2.md</a:t>
+              <a:t>Referência: documentação técnica consolidada do Safe Student</a:t>
             </a:r>
           </a:p>
         </p:txBody>
@@ -7303,25 +7303,25 @@
         </p:nvSpPr>
         <p:spPr>
           <a:xfrm>
-            <a:off x="548640" y="320040"/>
-            <a:ext cx="5120640" cy="274320"/>
-          </a:xfrm>
-          <a:prstGeom prst="rect">
-            <a:avLst/>
-          </a:prstGeom>
-          <a:noFill/>
-        </p:spPr>
-        <p:txBody>
-          <a:bodyPr wrap="square" anchor="t">
+            <a:off x="548640" y="310896"/>
+            <a:ext cx="5120640" cy="228600"/>
+          </a:xfrm>
+          <a:prstGeom prst="rect">
+            <a:avLst/>
+          </a:prstGeom>
+          <a:noFill/>
+        </p:spPr>
+        <p:txBody>
+          <a:bodyPr wrap="none" lIns="27432" rIns="27432" tIns="18288" bIns="18288">
             <a:spAutoFit/>
           </a:bodyPr>
           <a:lstStyle/>
           <a:p>
             <a:pPr algn="l"/>
             <a:r>
-              <a:rPr sz="1100" b="1">
-                <a:solidFill>
-                  <a:srgbClr val="188999"/>
+              <a:rPr sz="700" b="1">
+                <a:solidFill>
+                  <a:srgbClr val="007E82"/>
                 </a:solidFill>
                 <a:latin typeface="Aptos"/>
               </a:rPr>
@@ -7338,29 +7338,29 @@
         </p:nvSpPr>
         <p:spPr>
           <a:xfrm>
-            <a:off x="548640" y="658368"/>
-            <a:ext cx="10972800" cy="594360"/>
-          </a:xfrm>
-          <a:prstGeom prst="rect">
-            <a:avLst/>
-          </a:prstGeom>
-          <a:noFill/>
-        </p:spPr>
-        <p:txBody>
-          <a:bodyPr wrap="square" anchor="t">
+            <a:off x="548640" y="603504"/>
+            <a:ext cx="11064240" cy="457200"/>
+          </a:xfrm>
+          <a:prstGeom prst="rect">
+            <a:avLst/>
+          </a:prstGeom>
+          <a:noFill/>
+        </p:spPr>
+        <p:txBody>
+          <a:bodyPr wrap="none" lIns="27432" rIns="27432" tIns="18288" bIns="18288">
             <a:spAutoFit/>
           </a:bodyPr>
           <a:lstStyle/>
           <a:p>
             <a:pPr algn="l"/>
             <a:r>
-              <a:rPr sz="2600" b="1">
-                <a:solidFill>
-                  <a:srgbClr val="142A4A"/>
-                </a:solidFill>
-                <a:latin typeface="Aptos"/>
-              </a:rPr>
-              <a:t>Relações simples, sem setas de fluxo entre ator e caso de uso</a:t>
+              <a:rPr sz="2100" b="1">
+                <a:solidFill>
+                  <a:srgbClr val="213547"/>
+                </a:solidFill>
+                <a:latin typeface="Aptos"/>
+              </a:rPr>
+              <a:t>Diagrama unificado de casos de uso</a:t>
             </a:r>
           </a:p>
         </p:txBody>
@@ -7373,29 +7373,29 @@
         </p:nvSpPr>
         <p:spPr>
           <a:xfrm>
-            <a:off x="548640" y="1298448"/>
-            <a:ext cx="10972800" cy="411480"/>
-          </a:xfrm>
-          <a:prstGeom prst="rect">
-            <a:avLst/>
-          </a:prstGeom>
-          <a:noFill/>
-        </p:spPr>
-        <p:txBody>
-          <a:bodyPr wrap="square" anchor="t">
+            <a:off x="548640" y="1033271"/>
+            <a:ext cx="11064240" cy="320040"/>
+          </a:xfrm>
+          <a:prstGeom prst="rect">
+            <a:avLst/>
+          </a:prstGeom>
+          <a:noFill/>
+        </p:spPr>
+        <p:txBody>
+          <a:bodyPr wrap="none" lIns="27432" rIns="27432" tIns="18288" bIns="18288">
             <a:spAutoFit/>
           </a:bodyPr>
           <a:lstStyle/>
           <a:p>
             <a:pPr algn="l"/>
             <a:r>
-              <a:rPr sz="1300" b="0">
-                <a:solidFill>
-                  <a:srgbClr val="576374"/>
-                </a:solidFill>
-                <a:latin typeface="Aptos"/>
-              </a:rPr>
-              <a:t>A modelagem foi separada por ator para reduzir cruzamentos e interpretações ambíguas.</a:t>
+              <a:rPr sz="1100" b="0">
+                <a:solidFill>
+                  <a:srgbClr val="5E6E82"/>
+                </a:solidFill>
+                <a:latin typeface="Aptos"/>
+              </a:rPr>
+              <a:t>Responsável, Portaria e Gestão Escolar no mesmo diagrama — sem ator genérico e sem duplicar ações secundárias.</a:t>
             </a:r>
           </a:p>
         </p:txBody>
@@ -7408,14 +7408,14 @@
         </p:nvSpPr>
         <p:spPr>
           <a:xfrm>
-            <a:off x="548640" y="1783080"/>
-            <a:ext cx="11064240" cy="18288"/>
+            <a:off x="548640" y="1600200"/>
+            <a:ext cx="11064240" cy="13716"/>
           </a:xfrm>
           <a:prstGeom prst="rect">
             <a:avLst/>
           </a:prstGeom>
           <a:solidFill>
-            <a:srgbClr val="D6DEE6"/>
+            <a:srgbClr val="DCE4EA"/>
           </a:solidFill>
           <a:ln>
             <a:noFill/>
@@ -7445,24 +7445,92 @@
       </p:sp>
       <p:sp>
         <p:nvSpPr>
-          <p:cNvPr id="6" name="Rounded Rectangle 5"/>
+          <p:cNvPr id="6" name="TextBox 5"/>
+          <p:cNvSpPr txBox="1"/>
+          <p:nvPr/>
+        </p:nvSpPr>
+        <p:spPr>
+          <a:xfrm>
+            <a:off x="548640" y="6510528"/>
+            <a:ext cx="10241280" cy="228600"/>
+          </a:xfrm>
+          <a:prstGeom prst="rect">
+            <a:avLst/>
+          </a:prstGeom>
+          <a:noFill/>
+        </p:spPr>
+        <p:txBody>
+          <a:bodyPr wrap="none" lIns="27432" rIns="27432" tIns="18288" bIns="18288">
+            <a:spAutoFit/>
+          </a:bodyPr>
+          <a:lstStyle/>
+          <a:p>
+            <a:pPr algn="l"/>
+            <a:r>
+              <a:rPr sz="700" b="0">
+                <a:solidFill>
+                  <a:srgbClr val="5E6E82"/>
+                </a:solidFill>
+                <a:latin typeface="Aptos"/>
+              </a:rPr>
+              <a:t>Safe Student • Práticas Extensionistas Integradoras VI • Prof. Altemar Sales de Oliveira</a:t>
+            </a:r>
+          </a:p>
+        </p:txBody>
+      </p:sp>
+      <p:sp>
+        <p:nvSpPr>
+          <p:cNvPr id="7" name="TextBox 6"/>
+          <p:cNvSpPr txBox="1"/>
+          <p:nvPr/>
+        </p:nvSpPr>
+        <p:spPr>
+          <a:xfrm>
+            <a:off x="11201400" y="6473952"/>
+            <a:ext cx="411480" cy="228600"/>
+          </a:xfrm>
+          <a:prstGeom prst="rect">
+            <a:avLst/>
+          </a:prstGeom>
+          <a:noFill/>
+        </p:spPr>
+        <p:txBody>
+          <a:bodyPr wrap="none" lIns="27432" rIns="27432" tIns="18288" bIns="18288">
+            <a:spAutoFit/>
+          </a:bodyPr>
+          <a:lstStyle/>
+          <a:p>
+            <a:pPr algn="r"/>
+            <a:r>
+              <a:rPr sz="800" b="0">
+                <a:solidFill>
+                  <a:srgbClr val="5E6E82"/>
+                </a:solidFill>
+                <a:latin typeface="Aptos"/>
+              </a:rPr>
+              <a:t>5</a:t>
+            </a:r>
+          </a:p>
+        </p:txBody>
+      </p:sp>
+      <p:sp>
+        <p:nvSpPr>
+          <p:cNvPr id="8" name="Rounded Rectangle 7"/>
           <p:cNvSpPr/>
           <p:nvPr/>
         </p:nvSpPr>
         <p:spPr>
           <a:xfrm>
-            <a:off x="502920" y="1965960"/>
-            <a:ext cx="3337560" cy="4069080"/>
+            <a:off x="1554480" y="1737360"/>
+            <a:ext cx="9006840" cy="4443984"/>
           </a:xfrm>
           <a:prstGeom prst="roundRect">
             <a:avLst/>
           </a:prstGeom>
-          <a:solidFill>
-            <a:srgbClr val="FFFFFF"/>
-          </a:solidFill>
-          <a:ln w="12700">
+          <a:noFill/>
+          <a:ln w="19050">
             <a:solidFill>
-              <a:srgbClr val="D6DEE6"/>
+              <a:srgbClr val="2D4858"/>
             </a:solidFill>
           </a:ln>
         </p:spPr>
@@ -7488,85 +7556,726 @@
           </a:p>
         </p:txBody>
       </p:sp>
-      <p:pic>
-        <p:nvPicPr>
-          <p:cNvPr id="7" name="Picture 6" descr="01_uc_responsavel.png"/>
-          <p:cNvPicPr>
-            <a:picLocks noChangeAspect="1"/>
-          </p:cNvPicPr>
-          <p:nvPr/>
-        </p:nvPicPr>
-        <p:blipFill>
-          <a:blip r:embed="rId2"/>
-          <a:stretch>
-            <a:fillRect/>
-          </a:stretch>
-        </p:blipFill>
-        <p:spPr>
-          <a:xfrm>
-            <a:off x="649224" y="2121408"/>
-            <a:ext cx="3044952" cy="1992752"/>
-          </a:xfrm>
-          <a:prstGeom prst="rect">
-            <a:avLst/>
-          </a:prstGeom>
-        </p:spPr>
-      </p:pic>
-      <p:sp>
-        <p:nvSpPr>
-          <p:cNvPr id="8" name="TextBox 7"/>
+      <p:sp>
+        <p:nvSpPr>
+          <p:cNvPr id="9" name="TextBox 8"/>
           <p:cNvSpPr txBox="1"/>
           <p:nvPr/>
         </p:nvSpPr>
         <p:spPr>
           <a:xfrm>
-            <a:off x="685800" y="5605272"/>
-            <a:ext cx="2971800" cy="228600"/>
-          </a:xfrm>
-          <a:prstGeom prst="rect">
-            <a:avLst/>
-          </a:prstGeom>
-          <a:noFill/>
-        </p:spPr>
-        <p:txBody>
-          <a:bodyPr wrap="square" anchor="t">
+            <a:off x="1783080" y="1847088"/>
+            <a:ext cx="2194560" cy="228600"/>
+          </a:xfrm>
+          <a:prstGeom prst="rect">
+            <a:avLst/>
+          </a:prstGeom>
+          <a:noFill/>
+        </p:spPr>
+        <p:txBody>
+          <a:bodyPr wrap="none" lIns="27432" rIns="27432" tIns="18288" bIns="18288">
             <a:spAutoFit/>
           </a:bodyPr>
           <a:lstStyle/>
           <a:p>
-            <a:pPr algn="ctr"/>
-            <a:r>
-              <a:rPr sz="1150" b="1">
-                <a:solidFill>
-                  <a:srgbClr val="142A4A"/>
-                </a:solidFill>
-                <a:latin typeface="Aptos"/>
-              </a:rPr>
-              <a:t>Responsável</a:t>
-            </a:r>
-          </a:p>
-        </p:txBody>
-      </p:sp>
-      <p:sp>
-        <p:nvSpPr>
-          <p:cNvPr id="9" name="Rounded Rectangle 8"/>
+            <a:pPr algn="l"/>
+            <a:r>
+              <a:rPr sz="1000" b="1">
+                <a:solidFill>
+                  <a:srgbClr val="213547"/>
+                </a:solidFill>
+                <a:latin typeface="Aptos"/>
+              </a:rPr>
+              <a:t>Safe Student</a:t>
+            </a:r>
+          </a:p>
+        </p:txBody>
+      </p:sp>
+      <p:cxnSp>
+        <p:nvCxnSpPr>
+          <p:cNvPr id="10" name="Connector 9"/>
+          <p:cNvCxnSpPr/>
+          <p:nvPr/>
+        </p:nvCxnSpPr>
+        <p:spPr>
+          <a:xfrm flipV="1">
+            <a:off x="1234440" y="2112264"/>
+            <a:ext cx="4343400" cy="813816"/>
+          </a:xfrm>
+          <a:prstGeom prst="line">
+            <a:avLst/>
+          </a:prstGeom>
+          <a:ln w="13335">
+            <a:solidFill>
+              <a:srgbClr val="24638E"/>
+            </a:solidFill>
+          </a:ln>
+        </p:spPr>
+        <p:style>
+          <a:lnRef idx="2">
+            <a:schemeClr val="accent1"/>
+          </a:lnRef>
+          <a:fillRef idx="0">
+            <a:schemeClr val="accent1"/>
+          </a:fillRef>
+          <a:effectRef idx="1">
+            <a:schemeClr val="accent1"/>
+          </a:effectRef>
+          <a:fontRef idx="minor">
+            <a:schemeClr val="tx1"/>
+          </a:fontRef>
+        </p:style>
+      </p:cxnSp>
+      <p:cxnSp>
+        <p:nvCxnSpPr>
+          <p:cNvPr id="11" name="Connector 10"/>
+          <p:cNvCxnSpPr/>
+          <p:nvPr/>
+        </p:nvCxnSpPr>
+        <p:spPr>
+          <a:xfrm flipV="1">
+            <a:off x="1234440" y="2889504"/>
+            <a:ext cx="2674620" cy="36576"/>
+          </a:xfrm>
+          <a:prstGeom prst="line">
+            <a:avLst/>
+          </a:prstGeom>
+          <a:ln w="13335">
+            <a:solidFill>
+              <a:srgbClr val="24638E"/>
+            </a:solidFill>
+          </a:ln>
+        </p:spPr>
+        <p:style>
+          <a:lnRef idx="2">
+            <a:schemeClr val="accent1"/>
+          </a:lnRef>
+          <a:fillRef idx="0">
+            <a:schemeClr val="accent1"/>
+          </a:fillRef>
+          <a:effectRef idx="1">
+            <a:schemeClr val="accent1"/>
+          </a:effectRef>
+          <a:fontRef idx="minor">
+            <a:schemeClr val="tx1"/>
+          </a:fontRef>
+        </p:style>
+      </p:cxnSp>
+      <p:cxnSp>
+        <p:nvCxnSpPr>
+          <p:cNvPr id="12" name="Connector 11"/>
+          <p:cNvCxnSpPr/>
+          <p:nvPr/>
+        </p:nvCxnSpPr>
+        <p:spPr>
+          <a:xfrm>
+            <a:off x="1234440" y="2926080"/>
+            <a:ext cx="2720340" cy="667512"/>
+          </a:xfrm>
+          <a:prstGeom prst="line">
+            <a:avLst/>
+          </a:prstGeom>
+          <a:ln w="13335">
+            <a:solidFill>
+              <a:srgbClr val="24638E"/>
+            </a:solidFill>
+          </a:ln>
+        </p:spPr>
+        <p:style>
+          <a:lnRef idx="2">
+            <a:schemeClr val="accent1"/>
+          </a:lnRef>
+          <a:fillRef idx="0">
+            <a:schemeClr val="accent1"/>
+          </a:fillRef>
+          <a:effectRef idx="1">
+            <a:schemeClr val="accent1"/>
+          </a:effectRef>
+          <a:fontRef idx="minor">
+            <a:schemeClr val="tx1"/>
+          </a:fontRef>
+        </p:style>
+      </p:cxnSp>
+      <p:cxnSp>
+        <p:nvCxnSpPr>
+          <p:cNvPr id="13" name="Connector 12"/>
+          <p:cNvCxnSpPr/>
+          <p:nvPr/>
+        </p:nvCxnSpPr>
+        <p:spPr>
+          <a:xfrm flipV="1">
+            <a:off x="1234440" y="2889504"/>
+            <a:ext cx="5875020" cy="36576"/>
+          </a:xfrm>
+          <a:prstGeom prst="line">
+            <a:avLst/>
+          </a:prstGeom>
+          <a:ln w="13335">
+            <a:solidFill>
+              <a:srgbClr val="24638E"/>
+            </a:solidFill>
+          </a:ln>
+        </p:spPr>
+        <p:style>
+          <a:lnRef idx="2">
+            <a:schemeClr val="accent1"/>
+          </a:lnRef>
+          <a:fillRef idx="0">
+            <a:schemeClr val="accent1"/>
+          </a:fillRef>
+          <a:effectRef idx="1">
+            <a:schemeClr val="accent1"/>
+          </a:effectRef>
+          <a:fontRef idx="minor">
+            <a:schemeClr val="tx1"/>
+          </a:fontRef>
+        </p:style>
+      </p:cxnSp>
+      <p:cxnSp>
+        <p:nvCxnSpPr>
+          <p:cNvPr id="14" name="Connector 13"/>
+          <p:cNvCxnSpPr/>
+          <p:nvPr/>
+        </p:nvCxnSpPr>
+        <p:spPr>
+          <a:xfrm>
+            <a:off x="1234440" y="2926080"/>
+            <a:ext cx="5943600" cy="667512"/>
+          </a:xfrm>
+          <a:prstGeom prst="line">
+            <a:avLst/>
+          </a:prstGeom>
+          <a:ln w="13335">
+            <a:solidFill>
+              <a:srgbClr val="24638E"/>
+            </a:solidFill>
+          </a:ln>
+        </p:spPr>
+        <p:style>
+          <a:lnRef idx="2">
+            <a:schemeClr val="accent1"/>
+          </a:lnRef>
+          <a:fillRef idx="0">
+            <a:schemeClr val="accent1"/>
+          </a:fillRef>
+          <a:effectRef idx="1">
+            <a:schemeClr val="accent1"/>
+          </a:effectRef>
+          <a:fontRef idx="minor">
+            <a:schemeClr val="tx1"/>
+          </a:fontRef>
+        </p:style>
+      </p:cxnSp>
+      <p:cxnSp>
+        <p:nvCxnSpPr>
+          <p:cNvPr id="15" name="Connector 14"/>
+          <p:cNvCxnSpPr/>
+          <p:nvPr/>
+        </p:nvCxnSpPr>
+        <p:spPr>
+          <a:xfrm flipV="1">
+            <a:off x="1234440" y="2112264"/>
+            <a:ext cx="4343400" cy="2962656"/>
+          </a:xfrm>
+          <a:prstGeom prst="line">
+            <a:avLst/>
+          </a:prstGeom>
+          <a:ln w="13335">
+            <a:solidFill>
+              <a:srgbClr val="10845B"/>
+            </a:solidFill>
+          </a:ln>
+        </p:spPr>
+        <p:style>
+          <a:lnRef idx="2">
+            <a:schemeClr val="accent1"/>
+          </a:lnRef>
+          <a:fillRef idx="0">
+            <a:schemeClr val="accent1"/>
+          </a:fillRef>
+          <a:effectRef idx="1">
+            <a:schemeClr val="accent1"/>
+          </a:effectRef>
+          <a:fontRef idx="minor">
+            <a:schemeClr val="tx1"/>
+          </a:fontRef>
+        </p:style>
+      </p:cxnSp>
+      <p:cxnSp>
+        <p:nvCxnSpPr>
+          <p:cNvPr id="16" name="Connector 15"/>
+          <p:cNvCxnSpPr/>
+          <p:nvPr/>
+        </p:nvCxnSpPr>
+        <p:spPr>
+          <a:xfrm flipV="1">
+            <a:off x="1234440" y="4306824"/>
+            <a:ext cx="2628899" cy="768096"/>
+          </a:xfrm>
+          <a:prstGeom prst="line">
+            <a:avLst/>
+          </a:prstGeom>
+          <a:ln w="13335">
+            <a:solidFill>
+              <a:srgbClr val="10845B"/>
+            </a:solidFill>
+          </a:ln>
+        </p:spPr>
+        <p:style>
+          <a:lnRef idx="2">
+            <a:schemeClr val="accent1"/>
+          </a:lnRef>
+          <a:fillRef idx="0">
+            <a:schemeClr val="accent1"/>
+          </a:fillRef>
+          <a:effectRef idx="1">
+            <a:schemeClr val="accent1"/>
+          </a:effectRef>
+          <a:fontRef idx="minor">
+            <a:schemeClr val="tx1"/>
+          </a:fontRef>
+        </p:style>
+      </p:cxnSp>
+      <p:cxnSp>
+        <p:nvCxnSpPr>
+          <p:cNvPr id="17" name="Connector 16"/>
+          <p:cNvCxnSpPr/>
+          <p:nvPr/>
+        </p:nvCxnSpPr>
+        <p:spPr>
+          <a:xfrm flipV="1">
+            <a:off x="1234440" y="4306824"/>
+            <a:ext cx="5417820" cy="768096"/>
+          </a:xfrm>
+          <a:prstGeom prst="line">
+            <a:avLst/>
+          </a:prstGeom>
+          <a:ln w="13335">
+            <a:solidFill>
+              <a:srgbClr val="10845B"/>
+            </a:solidFill>
+          </a:ln>
+        </p:spPr>
+        <p:style>
+          <a:lnRef idx="2">
+            <a:schemeClr val="accent1"/>
+          </a:lnRef>
+          <a:fillRef idx="0">
+            <a:schemeClr val="accent1"/>
+          </a:fillRef>
+          <a:effectRef idx="1">
+            <a:schemeClr val="accent1"/>
+          </a:effectRef>
+          <a:fontRef idx="minor">
+            <a:schemeClr val="tx1"/>
+          </a:fontRef>
+        </p:style>
+      </p:cxnSp>
+      <p:cxnSp>
+        <p:nvCxnSpPr>
+          <p:cNvPr id="18" name="Connector 17"/>
+          <p:cNvCxnSpPr/>
+          <p:nvPr/>
+        </p:nvCxnSpPr>
+        <p:spPr>
+          <a:xfrm flipV="1">
+            <a:off x="1234440" y="2889504"/>
+            <a:ext cx="5875020" cy="2185416"/>
+          </a:xfrm>
+          <a:prstGeom prst="line">
+            <a:avLst/>
+          </a:prstGeom>
+          <a:ln w="13335">
+            <a:solidFill>
+              <a:srgbClr val="10845B"/>
+            </a:solidFill>
+          </a:ln>
+        </p:spPr>
+        <p:style>
+          <a:lnRef idx="2">
+            <a:schemeClr val="accent1"/>
+          </a:lnRef>
+          <a:fillRef idx="0">
+            <a:schemeClr val="accent1"/>
+          </a:fillRef>
+          <a:effectRef idx="1">
+            <a:schemeClr val="accent1"/>
+          </a:effectRef>
+          <a:fontRef idx="minor">
+            <a:schemeClr val="tx1"/>
+          </a:fontRef>
+        </p:style>
+      </p:cxnSp>
+      <p:cxnSp>
+        <p:nvCxnSpPr>
+          <p:cNvPr id="19" name="Connector 18"/>
+          <p:cNvCxnSpPr/>
+          <p:nvPr/>
+        </p:nvCxnSpPr>
+        <p:spPr>
+          <a:xfrm flipV="1">
+            <a:off x="1234440" y="3593592"/>
+            <a:ext cx="5943600" cy="1481328"/>
+          </a:xfrm>
+          <a:prstGeom prst="line">
+            <a:avLst/>
+          </a:prstGeom>
+          <a:ln w="13335">
+            <a:solidFill>
+              <a:srgbClr val="10845B"/>
+            </a:solidFill>
+          </a:ln>
+        </p:spPr>
+        <p:style>
+          <a:lnRef idx="2">
+            <a:schemeClr val="accent1"/>
+          </a:lnRef>
+          <a:fillRef idx="0">
+            <a:schemeClr val="accent1"/>
+          </a:fillRef>
+          <a:effectRef idx="1">
+            <a:schemeClr val="accent1"/>
+          </a:effectRef>
+          <a:fontRef idx="minor">
+            <a:schemeClr val="tx1"/>
+          </a:fontRef>
+        </p:style>
+      </p:cxnSp>
+      <p:cxnSp>
+        <p:nvCxnSpPr>
+          <p:cNvPr id="20" name="Connector 19"/>
+          <p:cNvCxnSpPr/>
+          <p:nvPr/>
+        </p:nvCxnSpPr>
+        <p:spPr>
+          <a:xfrm flipH="1" flipV="1">
+            <a:off x="5577840" y="2112264"/>
+            <a:ext cx="5166360" cy="1865375"/>
+          </a:xfrm>
+          <a:prstGeom prst="line">
+            <a:avLst/>
+          </a:prstGeom>
+          <a:ln w="13335">
+            <a:solidFill>
+              <a:srgbClr val="B85D00"/>
+            </a:solidFill>
+          </a:ln>
+        </p:spPr>
+        <p:style>
+          <a:lnRef idx="2">
+            <a:schemeClr val="accent1"/>
+          </a:lnRef>
+          <a:fillRef idx="0">
+            <a:schemeClr val="accent1"/>
+          </a:fillRef>
+          <a:effectRef idx="1">
+            <a:schemeClr val="accent1"/>
+          </a:effectRef>
+          <a:fontRef idx="minor">
+            <a:schemeClr val="tx1"/>
+          </a:fontRef>
+        </p:style>
+      </p:cxnSp>
+      <p:cxnSp>
+        <p:nvCxnSpPr>
+          <p:cNvPr id="21" name="Connector 20"/>
+          <p:cNvCxnSpPr/>
+          <p:nvPr/>
+        </p:nvCxnSpPr>
+        <p:spPr>
+          <a:xfrm flipH="1" flipV="1">
+            <a:off x="3909060" y="2889504"/>
+            <a:ext cx="6835140" cy="1088135"/>
+          </a:xfrm>
+          <a:prstGeom prst="line">
+            <a:avLst/>
+          </a:prstGeom>
+          <a:ln w="13335">
+            <a:solidFill>
+              <a:srgbClr val="B85D00"/>
+            </a:solidFill>
+          </a:ln>
+        </p:spPr>
+        <p:style>
+          <a:lnRef idx="2">
+            <a:schemeClr val="accent1"/>
+          </a:lnRef>
+          <a:fillRef idx="0">
+            <a:schemeClr val="accent1"/>
+          </a:fillRef>
+          <a:effectRef idx="1">
+            <a:schemeClr val="accent1"/>
+          </a:effectRef>
+          <a:fontRef idx="minor">
+            <a:schemeClr val="tx1"/>
+          </a:fontRef>
+        </p:style>
+      </p:cxnSp>
+      <p:cxnSp>
+        <p:nvCxnSpPr>
+          <p:cNvPr id="22" name="Connector 21"/>
+          <p:cNvCxnSpPr/>
+          <p:nvPr/>
+        </p:nvCxnSpPr>
+        <p:spPr>
+          <a:xfrm flipH="1">
+            <a:off x="3863339" y="3977639"/>
+            <a:ext cx="6880861" cy="329185"/>
+          </a:xfrm>
+          <a:prstGeom prst="line">
+            <a:avLst/>
+          </a:prstGeom>
+          <a:ln w="13335">
+            <a:solidFill>
+              <a:srgbClr val="B85D00"/>
+            </a:solidFill>
+          </a:ln>
+        </p:spPr>
+        <p:style>
+          <a:lnRef idx="2">
+            <a:schemeClr val="accent1"/>
+          </a:lnRef>
+          <a:fillRef idx="0">
+            <a:schemeClr val="accent1"/>
+          </a:fillRef>
+          <a:effectRef idx="1">
+            <a:schemeClr val="accent1"/>
+          </a:effectRef>
+          <a:fontRef idx="minor">
+            <a:schemeClr val="tx1"/>
+          </a:fontRef>
+        </p:style>
+      </p:cxnSp>
+      <p:cxnSp>
+        <p:nvCxnSpPr>
+          <p:cNvPr id="23" name="Connector 22"/>
+          <p:cNvCxnSpPr/>
+          <p:nvPr/>
+        </p:nvCxnSpPr>
+        <p:spPr>
+          <a:xfrm flipH="1">
+            <a:off x="6652260" y="3977639"/>
+            <a:ext cx="4091940" cy="329185"/>
+          </a:xfrm>
+          <a:prstGeom prst="line">
+            <a:avLst/>
+          </a:prstGeom>
+          <a:ln w="13335">
+            <a:solidFill>
+              <a:srgbClr val="B85D00"/>
+            </a:solidFill>
+          </a:ln>
+        </p:spPr>
+        <p:style>
+          <a:lnRef idx="2">
+            <a:schemeClr val="accent1"/>
+          </a:lnRef>
+          <a:fillRef idx="0">
+            <a:schemeClr val="accent1"/>
+          </a:fillRef>
+          <a:effectRef idx="1">
+            <a:schemeClr val="accent1"/>
+          </a:effectRef>
+          <a:fontRef idx="minor">
+            <a:schemeClr val="tx1"/>
+          </a:fontRef>
+        </p:style>
+      </p:cxnSp>
+      <p:cxnSp>
+        <p:nvCxnSpPr>
+          <p:cNvPr id="24" name="Connector 23"/>
+          <p:cNvCxnSpPr/>
+          <p:nvPr/>
+        </p:nvCxnSpPr>
+        <p:spPr>
+          <a:xfrm flipH="1">
+            <a:off x="7795260" y="3977639"/>
+            <a:ext cx="2948940" cy="923545"/>
+          </a:xfrm>
+          <a:prstGeom prst="line">
+            <a:avLst/>
+          </a:prstGeom>
+          <a:ln w="13335">
+            <a:solidFill>
+              <a:srgbClr val="B85D00"/>
+            </a:solidFill>
+          </a:ln>
+        </p:spPr>
+        <p:style>
+          <a:lnRef idx="2">
+            <a:schemeClr val="accent1"/>
+          </a:lnRef>
+          <a:fillRef idx="0">
+            <a:schemeClr val="accent1"/>
+          </a:fillRef>
+          <a:effectRef idx="1">
+            <a:schemeClr val="accent1"/>
+          </a:effectRef>
+          <a:fontRef idx="minor">
+            <a:schemeClr val="tx1"/>
+          </a:fontRef>
+        </p:style>
+      </p:cxnSp>
+      <p:cxnSp>
+        <p:nvCxnSpPr>
+          <p:cNvPr id="25" name="Connector 24"/>
+          <p:cNvCxnSpPr/>
+          <p:nvPr/>
+        </p:nvCxnSpPr>
+        <p:spPr>
+          <a:xfrm flipH="1">
+            <a:off x="5006340" y="3977639"/>
+            <a:ext cx="5737860" cy="1197865"/>
+          </a:xfrm>
+          <a:prstGeom prst="line">
+            <a:avLst/>
+          </a:prstGeom>
+          <a:ln w="13335">
+            <a:solidFill>
+              <a:srgbClr val="B85D00"/>
+            </a:solidFill>
+          </a:ln>
+        </p:spPr>
+        <p:style>
+          <a:lnRef idx="2">
+            <a:schemeClr val="accent1"/>
+          </a:lnRef>
+          <a:fillRef idx="0">
+            <a:schemeClr val="accent1"/>
+          </a:fillRef>
+          <a:effectRef idx="1">
+            <a:schemeClr val="accent1"/>
+          </a:effectRef>
+          <a:fontRef idx="minor">
+            <a:schemeClr val="tx1"/>
+          </a:fontRef>
+        </p:style>
+      </p:cxnSp>
+      <p:cxnSp>
+        <p:nvCxnSpPr>
+          <p:cNvPr id="26" name="Connector 25"/>
+          <p:cNvCxnSpPr/>
+          <p:nvPr/>
+        </p:nvCxnSpPr>
+        <p:spPr>
+          <a:xfrm flipH="1">
+            <a:off x="7863840" y="3977639"/>
+            <a:ext cx="2880360" cy="1655065"/>
+          </a:xfrm>
+          <a:prstGeom prst="line">
+            <a:avLst/>
+          </a:prstGeom>
+          <a:ln w="13335">
+            <a:solidFill>
+              <a:srgbClr val="B85D00"/>
+            </a:solidFill>
+          </a:ln>
+        </p:spPr>
+        <p:style>
+          <a:lnRef idx="2">
+            <a:schemeClr val="accent1"/>
+          </a:lnRef>
+          <a:fillRef idx="0">
+            <a:schemeClr val="accent1"/>
+          </a:fillRef>
+          <a:effectRef idx="1">
+            <a:schemeClr val="accent1"/>
+          </a:effectRef>
+          <a:fontRef idx="minor">
+            <a:schemeClr val="tx1"/>
+          </a:fontRef>
+        </p:style>
+      </p:cxnSp>
+      <p:cxnSp>
+        <p:nvCxnSpPr>
+          <p:cNvPr id="27" name="Connector 26"/>
+          <p:cNvCxnSpPr/>
+          <p:nvPr/>
+        </p:nvCxnSpPr>
+        <p:spPr>
+          <a:xfrm flipH="1" flipV="1">
+            <a:off x="7109460" y="2889504"/>
+            <a:ext cx="3634740" cy="1088135"/>
+          </a:xfrm>
+          <a:prstGeom prst="line">
+            <a:avLst/>
+          </a:prstGeom>
+          <a:ln w="13335">
+            <a:solidFill>
+              <a:srgbClr val="B85D00"/>
+            </a:solidFill>
+          </a:ln>
+        </p:spPr>
+        <p:style>
+          <a:lnRef idx="2">
+            <a:schemeClr val="accent1"/>
+          </a:lnRef>
+          <a:fillRef idx="0">
+            <a:schemeClr val="accent1"/>
+          </a:fillRef>
+          <a:effectRef idx="1">
+            <a:schemeClr val="accent1"/>
+          </a:effectRef>
+          <a:fontRef idx="minor">
+            <a:schemeClr val="tx1"/>
+          </a:fontRef>
+        </p:style>
+      </p:cxnSp>
+      <p:cxnSp>
+        <p:nvCxnSpPr>
+          <p:cNvPr id="28" name="Connector 27"/>
+          <p:cNvCxnSpPr/>
+          <p:nvPr/>
+        </p:nvCxnSpPr>
+        <p:spPr>
+          <a:xfrm flipH="1" flipV="1">
+            <a:off x="7178040" y="3593592"/>
+            <a:ext cx="3566160" cy="384047"/>
+          </a:xfrm>
+          <a:prstGeom prst="line">
+            <a:avLst/>
+          </a:prstGeom>
+          <a:ln w="13335">
+            <a:solidFill>
+              <a:srgbClr val="B85D00"/>
+            </a:solidFill>
+          </a:ln>
+        </p:spPr>
+        <p:style>
+          <a:lnRef idx="2">
+            <a:schemeClr val="accent1"/>
+          </a:lnRef>
+          <a:fillRef idx="0">
+            <a:schemeClr val="accent1"/>
+          </a:fillRef>
+          <a:effectRef idx="1">
+            <a:schemeClr val="accent1"/>
+          </a:effectRef>
+          <a:fontRef idx="minor">
+            <a:schemeClr val="tx1"/>
+          </a:fontRef>
+        </p:style>
+      </p:cxnSp>
+      <p:sp>
+        <p:nvSpPr>
+          <p:cNvPr id="29" name="Oval 28"/>
           <p:cNvSpPr/>
           <p:nvPr/>
         </p:nvSpPr>
         <p:spPr>
           <a:xfrm>
-            <a:off x="4160520" y="1965960"/>
-            <a:ext cx="3337560" cy="4069080"/>
-          </a:xfrm>
-          <a:prstGeom prst="roundRect">
+            <a:off x="4617720" y="1920240"/>
+            <a:ext cx="1920240" cy="384048"/>
+          </a:xfrm>
+          <a:prstGeom prst="ellipse">
             <a:avLst/>
           </a:prstGeom>
           <a:solidFill>
-            <a:srgbClr val="FFFFFF"/>
+            <a:srgbClr val="FDE2E2"/>
           </a:solidFill>
-          <a:ln w="12700">
+          <a:ln w="13970">
             <a:solidFill>
-              <a:srgbClr val="D6DEE6"/>
+              <a:srgbClr val="2D4858"/>
             </a:solidFill>
           </a:ln>
         </p:spPr>
@@ -7589,88 +8298,38 @@
           <a:lstStyle/>
           <a:p>
             <a:pPr algn="ctr"/>
-          </a:p>
-        </p:txBody>
-      </p:sp>
-      <p:pic>
-        <p:nvPicPr>
-          <p:cNvPr id="10" name="Picture 9" descr="02_uc_portaria.png"/>
-          <p:cNvPicPr>
-            <a:picLocks noChangeAspect="1"/>
-          </p:cNvPicPr>
-          <p:nvPr/>
-        </p:nvPicPr>
-        <p:blipFill>
-          <a:blip r:embed="rId3"/>
-          <a:stretch>
-            <a:fillRect/>
-          </a:stretch>
-        </p:blipFill>
-        <p:spPr>
-          <a:xfrm>
-            <a:off x="4306824" y="2121408"/>
-            <a:ext cx="3044952" cy="1992752"/>
-          </a:xfrm>
-          <a:prstGeom prst="rect">
-            <a:avLst/>
-          </a:prstGeom>
-        </p:spPr>
-      </p:pic>
-      <p:sp>
-        <p:nvSpPr>
-          <p:cNvPr id="11" name="TextBox 10"/>
-          <p:cNvSpPr txBox="1"/>
-          <p:nvPr/>
-        </p:nvSpPr>
-        <p:spPr>
-          <a:xfrm>
-            <a:off x="4343400" y="5605272"/>
-            <a:ext cx="2971800" cy="228600"/>
-          </a:xfrm>
-          <a:prstGeom prst="rect">
-            <a:avLst/>
-          </a:prstGeom>
-          <a:noFill/>
-        </p:spPr>
-        <p:txBody>
-          <a:bodyPr wrap="square" anchor="t">
-            <a:spAutoFit/>
-          </a:bodyPr>
-          <a:lstStyle/>
-          <a:p>
-            <a:pPr algn="ctr"/>
-            <a:r>
-              <a:rPr sz="1150" b="1">
-                <a:solidFill>
-                  <a:srgbClr val="142A4A"/>
-                </a:solidFill>
-                <a:latin typeface="Aptos"/>
-              </a:rPr>
-              <a:t>Portaria</a:t>
-            </a:r>
-          </a:p>
-        </p:txBody>
-      </p:sp>
-      <p:sp>
-        <p:nvSpPr>
-          <p:cNvPr id="12" name="Rounded Rectangle 11"/>
+            <a:r>
+              <a:rPr sz="830" b="1">
+                <a:solidFill>
+                  <a:srgbClr val="213547"/>
+                </a:solidFill>
+                <a:latin typeface="Aptos"/>
+              </a:rPr>
+              <a:t>Autenticar-se</a:t>
+            </a:r>
+          </a:p>
+        </p:txBody>
+      </p:sp>
+      <p:sp>
+        <p:nvSpPr>
+          <p:cNvPr id="30" name="Oval 29"/>
           <p:cNvSpPr/>
           <p:nvPr/>
         </p:nvSpPr>
         <p:spPr>
           <a:xfrm>
-            <a:off x="7818120" y="1965960"/>
-            <a:ext cx="3337560" cy="4069080"/>
-          </a:xfrm>
-          <a:prstGeom prst="roundRect">
+            <a:off x="2743200" y="2697480"/>
+            <a:ext cx="2331720" cy="384048"/>
+          </a:xfrm>
+          <a:prstGeom prst="ellipse">
             <a:avLst/>
           </a:prstGeom>
           <a:solidFill>
-            <a:srgbClr val="FFFFFF"/>
+            <a:srgbClr val="DDEEFF"/>
           </a:solidFill>
-          <a:ln w="12700">
+          <a:ln w="13970">
             <a:solidFill>
-              <a:srgbClr val="D6DEE6"/>
+              <a:srgbClr val="2D4858"/>
             </a:solidFill>
           </a:ln>
         </p:spPr>
@@ -7693,134 +8352,1154 @@
           <a:lstStyle/>
           <a:p>
             <a:pPr algn="ctr"/>
-          </a:p>
-        </p:txBody>
-      </p:sp>
-      <p:pic>
-        <p:nvPicPr>
-          <p:cNvPr id="13" name="Picture 12" descr="03_uc_gestao.png"/>
-          <p:cNvPicPr>
-            <a:picLocks noChangeAspect="1"/>
-          </p:cNvPicPr>
-          <p:nvPr/>
-        </p:nvPicPr>
-        <p:blipFill>
-          <a:blip r:embed="rId4"/>
-          <a:stretch>
-            <a:fillRect/>
-          </a:stretch>
-        </p:blipFill>
-        <p:spPr>
-          <a:xfrm>
-            <a:off x="7964424" y="2121408"/>
-            <a:ext cx="3044952" cy="2948529"/>
-          </a:xfrm>
-          <a:prstGeom prst="rect">
-            <a:avLst/>
-          </a:prstGeom>
-        </p:spPr>
-      </p:pic>
-      <p:sp>
-        <p:nvSpPr>
-          <p:cNvPr id="14" name="TextBox 13"/>
+            <a:r>
+              <a:rPr sz="830" b="1">
+                <a:solidFill>
+                  <a:srgbClr val="213547"/>
+                </a:solidFill>
+                <a:latin typeface="Aptos"/>
+              </a:rPr>
+              <a:t>Acompanhar presença</a:t>
+            </a:r>
+          </a:p>
+        </p:txBody>
+      </p:sp>
+      <p:sp>
+        <p:nvSpPr>
+          <p:cNvPr id="31" name="Oval 30"/>
+          <p:cNvSpPr/>
+          <p:nvPr/>
+        </p:nvSpPr>
+        <p:spPr>
+          <a:xfrm>
+            <a:off x="2743200" y="3401568"/>
+            <a:ext cx="2423160" cy="384048"/>
+          </a:xfrm>
+          <a:prstGeom prst="ellipse">
+            <a:avLst/>
+          </a:prstGeom>
+          <a:solidFill>
+            <a:srgbClr val="DFF7EC"/>
+          </a:solidFill>
+          <a:ln w="13970">
+            <a:solidFill>
+              <a:srgbClr val="2D4858"/>
+            </a:solidFill>
+          </a:ln>
+        </p:spPr>
+        <p:style>
+          <a:lnRef idx="1">
+            <a:schemeClr val="accent1"/>
+          </a:lnRef>
+          <a:fillRef idx="3">
+            <a:schemeClr val="accent1"/>
+          </a:fillRef>
+          <a:effectRef idx="2">
+            <a:schemeClr val="accent1"/>
+          </a:effectRef>
+          <a:fontRef idx="minor">
+            <a:schemeClr val="lt1"/>
+          </a:fontRef>
+        </p:style>
+        <p:txBody>
+          <a:bodyPr rtlCol="0" anchor="ctr"/>
+          <a:lstStyle/>
+          <a:p>
+            <a:pPr algn="ctr"/>
+            <a:r>
+              <a:rPr sz="830" b="1">
+                <a:solidFill>
+                  <a:srgbClr val="213547"/>
+                </a:solidFill>
+                <a:latin typeface="Aptos"/>
+              </a:rPr>
+              <a:t>Consultar notificações</a:t>
+            </a:r>
+          </a:p>
+        </p:txBody>
+      </p:sp>
+      <p:sp>
+        <p:nvSpPr>
+          <p:cNvPr id="32" name="Oval 31"/>
+          <p:cNvSpPr/>
+          <p:nvPr/>
+        </p:nvSpPr>
+        <p:spPr>
+          <a:xfrm>
+            <a:off x="6080760" y="2697480"/>
+            <a:ext cx="2057400" cy="384048"/>
+          </a:xfrm>
+          <a:prstGeom prst="ellipse">
+            <a:avLst/>
+          </a:prstGeom>
+          <a:solidFill>
+            <a:srgbClr val="FFF0D9"/>
+          </a:solidFill>
+          <a:ln w="13970">
+            <a:solidFill>
+              <a:srgbClr val="2D4858"/>
+            </a:solidFill>
+          </a:ln>
+        </p:spPr>
+        <p:style>
+          <a:lnRef idx="1">
+            <a:schemeClr val="accent1"/>
+          </a:lnRef>
+          <a:fillRef idx="3">
+            <a:schemeClr val="accent1"/>
+          </a:fillRef>
+          <a:effectRef idx="2">
+            <a:schemeClr val="accent1"/>
+          </a:effectRef>
+          <a:fontRef idx="minor">
+            <a:schemeClr val="lt1"/>
+          </a:fontRef>
+        </p:style>
+        <p:txBody>
+          <a:bodyPr rtlCol="0" anchor="ctr"/>
+          <a:lstStyle/>
+          <a:p>
+            <a:pPr algn="ctr"/>
+            <a:r>
+              <a:rPr sz="830" b="1">
+                <a:solidFill>
+                  <a:srgbClr val="213547"/>
+                </a:solidFill>
+                <a:latin typeface="Aptos"/>
+              </a:rPr>
+              <a:t>Trocar mensagens</a:t>
+            </a:r>
+          </a:p>
+        </p:txBody>
+      </p:sp>
+      <p:sp>
+        <p:nvSpPr>
+          <p:cNvPr id="33" name="Oval 32"/>
+          <p:cNvSpPr/>
+          <p:nvPr/>
+        </p:nvSpPr>
+        <p:spPr>
+          <a:xfrm>
+            <a:off x="5943600" y="3401568"/>
+            <a:ext cx="2468880" cy="384048"/>
+          </a:xfrm>
+          <a:prstGeom prst="ellipse">
+            <a:avLst/>
+          </a:prstGeom>
+          <a:solidFill>
+            <a:srgbClr val="F1E4FF"/>
+          </a:solidFill>
+          <a:ln w="13970">
+            <a:solidFill>
+              <a:srgbClr val="2D4858"/>
+            </a:solidFill>
+          </a:ln>
+        </p:spPr>
+        <p:style>
+          <a:lnRef idx="1">
+            <a:schemeClr val="accent1"/>
+          </a:lnRef>
+          <a:fillRef idx="3">
+            <a:schemeClr val="accent1"/>
+          </a:fillRef>
+          <a:effectRef idx="2">
+            <a:schemeClr val="accent1"/>
+          </a:effectRef>
+          <a:fontRef idx="minor">
+            <a:schemeClr val="lt1"/>
+          </a:fontRef>
+        </p:style>
+        <p:txBody>
+          <a:bodyPr rtlCol="0" anchor="ctr"/>
+          <a:lstStyle/>
+          <a:p>
+            <a:pPr algn="ctr"/>
+            <a:r>
+              <a:rPr sz="830" b="1">
+                <a:solidFill>
+                  <a:srgbClr val="213547"/>
+                </a:solidFill>
+                <a:latin typeface="Aptos"/>
+              </a:rPr>
+              <a:t>Registrar feedback acadêmico</a:t>
+            </a:r>
+          </a:p>
+        </p:txBody>
+      </p:sp>
+      <p:sp>
+        <p:nvSpPr>
+          <p:cNvPr id="34" name="Oval 33"/>
+          <p:cNvSpPr/>
+          <p:nvPr/>
+        </p:nvSpPr>
+        <p:spPr>
+          <a:xfrm>
+            <a:off x="2834640" y="4114800"/>
+            <a:ext cx="2057400" cy="384048"/>
+          </a:xfrm>
+          <a:prstGeom prst="ellipse">
+            <a:avLst/>
+          </a:prstGeom>
+          <a:solidFill>
+            <a:srgbClr val="DDEFF2"/>
+          </a:solidFill>
+          <a:ln w="13970">
+            <a:solidFill>
+              <a:srgbClr val="2D4858"/>
+            </a:solidFill>
+          </a:ln>
+        </p:spPr>
+        <p:style>
+          <a:lnRef idx="1">
+            <a:schemeClr val="accent1"/>
+          </a:lnRef>
+          <a:fillRef idx="3">
+            <a:schemeClr val="accent1"/>
+          </a:fillRef>
+          <a:effectRef idx="2">
+            <a:schemeClr val="accent1"/>
+          </a:effectRef>
+          <a:fontRef idx="minor">
+            <a:schemeClr val="lt1"/>
+          </a:fontRef>
+        </p:style>
+        <p:txBody>
+          <a:bodyPr rtlCol="0" anchor="ctr"/>
+          <a:lstStyle/>
+          <a:p>
+            <a:pPr algn="ctr"/>
+            <a:r>
+              <a:rPr sz="830" b="1">
+                <a:solidFill>
+                  <a:srgbClr val="213547"/>
+                </a:solidFill>
+                <a:latin typeface="Aptos"/>
+              </a:rPr>
+              <a:t>Consultar alunos</a:t>
+            </a:r>
+          </a:p>
+        </p:txBody>
+      </p:sp>
+      <p:sp>
+        <p:nvSpPr>
+          <p:cNvPr id="35" name="Oval 34"/>
+          <p:cNvSpPr/>
+          <p:nvPr/>
+        </p:nvSpPr>
+        <p:spPr>
+          <a:xfrm>
+            <a:off x="5623560" y="4114800"/>
+            <a:ext cx="2057400" cy="384048"/>
+          </a:xfrm>
+          <a:prstGeom prst="ellipse">
+            <a:avLst/>
+          </a:prstGeom>
+          <a:solidFill>
+            <a:srgbClr val="DFF7EC"/>
+          </a:solidFill>
+          <a:ln w="13970">
+            <a:solidFill>
+              <a:srgbClr val="2D4858"/>
+            </a:solidFill>
+          </a:ln>
+        </p:spPr>
+        <p:style>
+          <a:lnRef idx="1">
+            <a:schemeClr val="accent1"/>
+          </a:lnRef>
+          <a:fillRef idx="3">
+            <a:schemeClr val="accent1"/>
+          </a:fillRef>
+          <a:effectRef idx="2">
+            <a:schemeClr val="accent1"/>
+          </a:effectRef>
+          <a:fontRef idx="minor">
+            <a:schemeClr val="lt1"/>
+          </a:fontRef>
+        </p:style>
+        <p:txBody>
+          <a:bodyPr rtlCol="0" anchor="ctr"/>
+          <a:lstStyle/>
+          <a:p>
+            <a:pPr algn="ctr"/>
+            <a:r>
+              <a:rPr sz="830" b="1">
+                <a:solidFill>
+                  <a:srgbClr val="213547"/>
+                </a:solidFill>
+                <a:latin typeface="Aptos"/>
+              </a:rPr>
+              <a:t>Registrar presença</a:t>
+            </a:r>
+          </a:p>
+        </p:txBody>
+      </p:sp>
+      <p:sp>
+        <p:nvSpPr>
+          <p:cNvPr id="36" name="Oval 35"/>
+          <p:cNvSpPr/>
+          <p:nvPr/>
+        </p:nvSpPr>
+        <p:spPr>
+          <a:xfrm>
+            <a:off x="6492240" y="4709160"/>
+            <a:ext cx="2606040" cy="384048"/>
+          </a:xfrm>
+          <a:prstGeom prst="ellipse">
+            <a:avLst/>
+          </a:prstGeom>
+          <a:solidFill>
+            <a:srgbClr val="FFF0D9"/>
+          </a:solidFill>
+          <a:ln w="13970">
+            <a:solidFill>
+              <a:srgbClr val="2D4858"/>
+            </a:solidFill>
+          </a:ln>
+        </p:spPr>
+        <p:style>
+          <a:lnRef idx="1">
+            <a:schemeClr val="accent1"/>
+          </a:lnRef>
+          <a:fillRef idx="3">
+            <a:schemeClr val="accent1"/>
+          </a:fillRef>
+          <a:effectRef idx="2">
+            <a:schemeClr val="accent1"/>
+          </a:effectRef>
+          <a:fontRef idx="minor">
+            <a:schemeClr val="lt1"/>
+          </a:fontRef>
+        </p:style>
+        <p:txBody>
+          <a:bodyPr rtlCol="0" anchor="ctr"/>
+          <a:lstStyle/>
+          <a:p>
+            <a:pPr algn="ctr"/>
+            <a:r>
+              <a:rPr sz="830" b="1">
+                <a:solidFill>
+                  <a:srgbClr val="213547"/>
+                </a:solidFill>
+                <a:latin typeface="Aptos"/>
+              </a:rPr>
+              <a:t>Gerenciar alunos e vínculos</a:t>
+            </a:r>
+          </a:p>
+        </p:txBody>
+      </p:sp>
+      <p:sp>
+        <p:nvSpPr>
+          <p:cNvPr id="37" name="Oval 36"/>
+          <p:cNvSpPr/>
+          <p:nvPr/>
+        </p:nvSpPr>
+        <p:spPr>
+          <a:xfrm>
+            <a:off x="3931920" y="4983480"/>
+            <a:ext cx="2148840" cy="384048"/>
+          </a:xfrm>
+          <a:prstGeom prst="ellipse">
+            <a:avLst/>
+          </a:prstGeom>
+          <a:solidFill>
+            <a:srgbClr val="DDEFF2"/>
+          </a:solidFill>
+          <a:ln w="13970">
+            <a:solidFill>
+              <a:srgbClr val="2D4858"/>
+            </a:solidFill>
+          </a:ln>
+        </p:spPr>
+        <p:style>
+          <a:lnRef idx="1">
+            <a:schemeClr val="accent1"/>
+          </a:lnRef>
+          <a:fillRef idx="3">
+            <a:schemeClr val="accent1"/>
+          </a:fillRef>
+          <a:effectRef idx="2">
+            <a:schemeClr val="accent1"/>
+          </a:effectRef>
+          <a:fontRef idx="minor">
+            <a:schemeClr val="lt1"/>
+          </a:fontRef>
+        </p:style>
+        <p:txBody>
+          <a:bodyPr rtlCol="0" anchor="ctr"/>
+          <a:lstStyle/>
+          <a:p>
+            <a:pPr algn="ctr"/>
+            <a:r>
+              <a:rPr sz="830" b="1">
+                <a:solidFill>
+                  <a:srgbClr val="213547"/>
+                </a:solidFill>
+                <a:latin typeface="Aptos"/>
+              </a:rPr>
+              <a:t>Consultar auditoria</a:t>
+            </a:r>
+          </a:p>
+        </p:txBody>
+      </p:sp>
+      <p:sp>
+        <p:nvSpPr>
+          <p:cNvPr id="38" name="Oval 37"/>
+          <p:cNvSpPr/>
+          <p:nvPr/>
+        </p:nvSpPr>
+        <p:spPr>
+          <a:xfrm>
+            <a:off x="6400800" y="5440680"/>
+            <a:ext cx="2926080" cy="384048"/>
+          </a:xfrm>
+          <a:prstGeom prst="ellipse">
+            <a:avLst/>
+          </a:prstGeom>
+          <a:solidFill>
+            <a:srgbClr val="F1E4FF"/>
+          </a:solidFill>
+          <a:ln w="13970">
+            <a:solidFill>
+              <a:srgbClr val="2D4858"/>
+            </a:solidFill>
+          </a:ln>
+        </p:spPr>
+        <p:style>
+          <a:lnRef idx="1">
+            <a:schemeClr val="accent1"/>
+          </a:lnRef>
+          <a:fillRef idx="3">
+            <a:schemeClr val="accent1"/>
+          </a:fillRef>
+          <a:effectRef idx="2">
+            <a:schemeClr val="accent1"/>
+          </a:effectRef>
+          <a:fontRef idx="minor">
+            <a:schemeClr val="lt1"/>
+          </a:fontRef>
+        </p:style>
+        <p:txBody>
+          <a:bodyPr rtlCol="0" anchor="ctr"/>
+          <a:lstStyle/>
+          <a:p>
+            <a:pPr algn="ctr"/>
+            <a:r>
+              <a:rPr sz="830" b="1">
+                <a:solidFill>
+                  <a:srgbClr val="213547"/>
+                </a:solidFill>
+                <a:latin typeface="Aptos"/>
+              </a:rPr>
+              <a:t>Consultar validação acadêmica</a:t>
+            </a:r>
+          </a:p>
+        </p:txBody>
+      </p:sp>
+      <p:sp>
+        <p:nvSpPr>
+          <p:cNvPr id="39" name="Oval 38"/>
+          <p:cNvSpPr/>
+          <p:nvPr/>
+        </p:nvSpPr>
+        <p:spPr>
+          <a:xfrm>
+            <a:off x="777240" y="2057400"/>
+            <a:ext cx="329184" cy="329184"/>
+          </a:xfrm>
+          <a:prstGeom prst="ellipse">
+            <a:avLst/>
+          </a:prstGeom>
+          <a:noFill/>
+          <a:ln w="25400">
+            <a:solidFill>
+              <a:srgbClr val="24638E"/>
+            </a:solidFill>
+          </a:ln>
+        </p:spPr>
+        <p:style>
+          <a:lnRef idx="1">
+            <a:schemeClr val="accent1"/>
+          </a:lnRef>
+          <a:fillRef idx="3">
+            <a:schemeClr val="accent1"/>
+          </a:fillRef>
+          <a:effectRef idx="2">
+            <a:schemeClr val="accent1"/>
+          </a:effectRef>
+          <a:fontRef idx="minor">
+            <a:schemeClr val="lt1"/>
+          </a:fontRef>
+        </p:style>
+        <p:txBody>
+          <a:bodyPr rtlCol="0" anchor="ctr"/>
+          <a:lstStyle/>
+          <a:p>
+            <a:pPr algn="ctr"/>
+          </a:p>
+        </p:txBody>
+      </p:sp>
+      <p:cxnSp>
+        <p:nvCxnSpPr>
+          <p:cNvPr id="40" name="Connector 39"/>
+          <p:cNvCxnSpPr/>
+          <p:nvPr/>
+        </p:nvCxnSpPr>
+        <p:spPr>
+          <a:xfrm>
+            <a:off x="941832" y="2386584"/>
+            <a:ext cx="0" cy="512064"/>
+          </a:xfrm>
+          <a:prstGeom prst="line">
+            <a:avLst/>
+          </a:prstGeom>
+          <a:ln w="25400">
+            <a:solidFill>
+              <a:srgbClr val="24638E"/>
+            </a:solidFill>
+          </a:ln>
+        </p:spPr>
+        <p:style>
+          <a:lnRef idx="2">
+            <a:schemeClr val="accent1"/>
+          </a:lnRef>
+          <a:fillRef idx="0">
+            <a:schemeClr val="accent1"/>
+          </a:fillRef>
+          <a:effectRef idx="1">
+            <a:schemeClr val="accent1"/>
+          </a:effectRef>
+          <a:fontRef idx="minor">
+            <a:schemeClr val="tx1"/>
+          </a:fontRef>
+        </p:style>
+      </p:cxnSp>
+      <p:cxnSp>
+        <p:nvCxnSpPr>
+          <p:cNvPr id="41" name="Connector 40"/>
+          <p:cNvCxnSpPr/>
+          <p:nvPr/>
+        </p:nvCxnSpPr>
+        <p:spPr>
+          <a:xfrm>
+            <a:off x="640080" y="2560320"/>
+            <a:ext cx="603504" cy="0"/>
+          </a:xfrm>
+          <a:prstGeom prst="line">
+            <a:avLst/>
+          </a:prstGeom>
+          <a:ln w="25400">
+            <a:solidFill>
+              <a:srgbClr val="24638E"/>
+            </a:solidFill>
+          </a:ln>
+        </p:spPr>
+        <p:style>
+          <a:lnRef idx="2">
+            <a:schemeClr val="accent1"/>
+          </a:lnRef>
+          <a:fillRef idx="0">
+            <a:schemeClr val="accent1"/>
+          </a:fillRef>
+          <a:effectRef idx="1">
+            <a:schemeClr val="accent1"/>
+          </a:effectRef>
+          <a:fontRef idx="minor">
+            <a:schemeClr val="tx1"/>
+          </a:fontRef>
+        </p:style>
+      </p:cxnSp>
+      <p:cxnSp>
+        <p:nvCxnSpPr>
+          <p:cNvPr id="42" name="Connector 41"/>
+          <p:cNvCxnSpPr/>
+          <p:nvPr/>
+        </p:nvCxnSpPr>
+        <p:spPr>
+          <a:xfrm flipH="1">
+            <a:off x="658368" y="2898648"/>
+            <a:ext cx="283464" cy="457200"/>
+          </a:xfrm>
+          <a:prstGeom prst="line">
+            <a:avLst/>
+          </a:prstGeom>
+          <a:ln w="25400">
+            <a:solidFill>
+              <a:srgbClr val="24638E"/>
+            </a:solidFill>
+          </a:ln>
+        </p:spPr>
+        <p:style>
+          <a:lnRef idx="2">
+            <a:schemeClr val="accent1"/>
+          </a:lnRef>
+          <a:fillRef idx="0">
+            <a:schemeClr val="accent1"/>
+          </a:fillRef>
+          <a:effectRef idx="1">
+            <a:schemeClr val="accent1"/>
+          </a:effectRef>
+          <a:fontRef idx="minor">
+            <a:schemeClr val="tx1"/>
+          </a:fontRef>
+        </p:style>
+      </p:cxnSp>
+      <p:cxnSp>
+        <p:nvCxnSpPr>
+          <p:cNvPr id="43" name="Connector 42"/>
+          <p:cNvCxnSpPr/>
+          <p:nvPr/>
+        </p:nvCxnSpPr>
+        <p:spPr>
+          <a:xfrm>
+            <a:off x="941832" y="2898648"/>
+            <a:ext cx="283463" cy="457200"/>
+          </a:xfrm>
+          <a:prstGeom prst="line">
+            <a:avLst/>
+          </a:prstGeom>
+          <a:ln w="25400">
+            <a:solidFill>
+              <a:srgbClr val="24638E"/>
+            </a:solidFill>
+          </a:ln>
+        </p:spPr>
+        <p:style>
+          <a:lnRef idx="2">
+            <a:schemeClr val="accent1"/>
+          </a:lnRef>
+          <a:fillRef idx="0">
+            <a:schemeClr val="accent1"/>
+          </a:fillRef>
+          <a:effectRef idx="1">
+            <a:schemeClr val="accent1"/>
+          </a:effectRef>
+          <a:fontRef idx="minor">
+            <a:schemeClr val="tx1"/>
+          </a:fontRef>
+        </p:style>
+      </p:cxnSp>
+      <p:sp>
+        <p:nvSpPr>
+          <p:cNvPr id="44" name="TextBox 43"/>
           <p:cNvSpPr txBox="1"/>
           <p:nvPr/>
         </p:nvSpPr>
         <p:spPr>
           <a:xfrm>
-            <a:off x="8001000" y="5605272"/>
-            <a:ext cx="2971800" cy="228600"/>
-          </a:xfrm>
-          <a:prstGeom prst="rect">
-            <a:avLst/>
-          </a:prstGeom>
-          <a:noFill/>
-        </p:spPr>
-        <p:txBody>
-          <a:bodyPr wrap="square" anchor="t">
+            <a:off x="365759" y="3429000"/>
+            <a:ext cx="1188720" cy="274320"/>
+          </a:xfrm>
+          <a:prstGeom prst="rect">
+            <a:avLst/>
+          </a:prstGeom>
+          <a:noFill/>
+        </p:spPr>
+        <p:txBody>
+          <a:bodyPr wrap="none" lIns="27432" rIns="27432" tIns="18288" bIns="18288">
             <a:spAutoFit/>
           </a:bodyPr>
           <a:lstStyle/>
           <a:p>
             <a:pPr algn="ctr"/>
             <a:r>
-              <a:rPr sz="1150" b="1">
-                <a:solidFill>
-                  <a:srgbClr val="142A4A"/>
-                </a:solidFill>
-                <a:latin typeface="Aptos"/>
-              </a:rPr>
-              <a:t>Gestão escolar</a:t>
-            </a:r>
-          </a:p>
-        </p:txBody>
-      </p:sp>
-      <p:sp>
-        <p:nvSpPr>
-          <p:cNvPr id="15" name="TextBox 14"/>
+              <a:rPr sz="1000" b="1">
+                <a:solidFill>
+                  <a:srgbClr val="24638E"/>
+                </a:solidFill>
+                <a:latin typeface="Aptos"/>
+              </a:rPr>
+              <a:t>Responsável</a:t>
+            </a:r>
+          </a:p>
+        </p:txBody>
+      </p:sp>
+      <p:sp>
+        <p:nvSpPr>
+          <p:cNvPr id="45" name="Oval 44"/>
+          <p:cNvSpPr/>
+          <p:nvPr/>
+        </p:nvSpPr>
+        <p:spPr>
+          <a:xfrm>
+            <a:off x="777240" y="4206240"/>
+            <a:ext cx="329184" cy="329184"/>
+          </a:xfrm>
+          <a:prstGeom prst="ellipse">
+            <a:avLst/>
+          </a:prstGeom>
+          <a:noFill/>
+          <a:ln w="25400">
+            <a:solidFill>
+              <a:srgbClr val="10845B"/>
+            </a:solidFill>
+          </a:ln>
+        </p:spPr>
+        <p:style>
+          <a:lnRef idx="1">
+            <a:schemeClr val="accent1"/>
+          </a:lnRef>
+          <a:fillRef idx="3">
+            <a:schemeClr val="accent1"/>
+          </a:fillRef>
+          <a:effectRef idx="2">
+            <a:schemeClr val="accent1"/>
+          </a:effectRef>
+          <a:fontRef idx="minor">
+            <a:schemeClr val="lt1"/>
+          </a:fontRef>
+        </p:style>
+        <p:txBody>
+          <a:bodyPr rtlCol="0" anchor="ctr"/>
+          <a:lstStyle/>
+          <a:p>
+            <a:pPr algn="ctr"/>
+          </a:p>
+        </p:txBody>
+      </p:sp>
+      <p:cxnSp>
+        <p:nvCxnSpPr>
+          <p:cNvPr id="46" name="Connector 45"/>
+          <p:cNvCxnSpPr/>
+          <p:nvPr/>
+        </p:nvCxnSpPr>
+        <p:spPr>
+          <a:xfrm>
+            <a:off x="941832" y="4535424"/>
+            <a:ext cx="0" cy="512064"/>
+          </a:xfrm>
+          <a:prstGeom prst="line">
+            <a:avLst/>
+          </a:prstGeom>
+          <a:ln w="25400">
+            <a:solidFill>
+              <a:srgbClr val="10845B"/>
+            </a:solidFill>
+          </a:ln>
+        </p:spPr>
+        <p:style>
+          <a:lnRef idx="2">
+            <a:schemeClr val="accent1"/>
+          </a:lnRef>
+          <a:fillRef idx="0">
+            <a:schemeClr val="accent1"/>
+          </a:fillRef>
+          <a:effectRef idx="1">
+            <a:schemeClr val="accent1"/>
+          </a:effectRef>
+          <a:fontRef idx="minor">
+            <a:schemeClr val="tx1"/>
+          </a:fontRef>
+        </p:style>
+      </p:cxnSp>
+      <p:cxnSp>
+        <p:nvCxnSpPr>
+          <p:cNvPr id="47" name="Connector 46"/>
+          <p:cNvCxnSpPr/>
+          <p:nvPr/>
+        </p:nvCxnSpPr>
+        <p:spPr>
+          <a:xfrm>
+            <a:off x="640080" y="4709159"/>
+            <a:ext cx="603504" cy="0"/>
+          </a:xfrm>
+          <a:prstGeom prst="line">
+            <a:avLst/>
+          </a:prstGeom>
+          <a:ln w="25400">
+            <a:solidFill>
+              <a:srgbClr val="10845B"/>
+            </a:solidFill>
+          </a:ln>
+        </p:spPr>
+        <p:style>
+          <a:lnRef idx="2">
+            <a:schemeClr val="accent1"/>
+          </a:lnRef>
+          <a:fillRef idx="0">
+            <a:schemeClr val="accent1"/>
+          </a:fillRef>
+          <a:effectRef idx="1">
+            <a:schemeClr val="accent1"/>
+          </a:effectRef>
+          <a:fontRef idx="minor">
+            <a:schemeClr val="tx1"/>
+          </a:fontRef>
+        </p:style>
+      </p:cxnSp>
+      <p:cxnSp>
+        <p:nvCxnSpPr>
+          <p:cNvPr id="48" name="Connector 47"/>
+          <p:cNvCxnSpPr/>
+          <p:nvPr/>
+        </p:nvCxnSpPr>
+        <p:spPr>
+          <a:xfrm flipH="1">
+            <a:off x="658368" y="5047488"/>
+            <a:ext cx="283464" cy="457200"/>
+          </a:xfrm>
+          <a:prstGeom prst="line">
+            <a:avLst/>
+          </a:prstGeom>
+          <a:ln w="25400">
+            <a:solidFill>
+              <a:srgbClr val="10845B"/>
+            </a:solidFill>
+          </a:ln>
+        </p:spPr>
+        <p:style>
+          <a:lnRef idx="2">
+            <a:schemeClr val="accent1"/>
+          </a:lnRef>
+          <a:fillRef idx="0">
+            <a:schemeClr val="accent1"/>
+          </a:fillRef>
+          <a:effectRef idx="1">
+            <a:schemeClr val="accent1"/>
+          </a:effectRef>
+          <a:fontRef idx="minor">
+            <a:schemeClr val="tx1"/>
+          </a:fontRef>
+        </p:style>
+      </p:cxnSp>
+      <p:cxnSp>
+        <p:nvCxnSpPr>
+          <p:cNvPr id="49" name="Connector 48"/>
+          <p:cNvCxnSpPr/>
+          <p:nvPr/>
+        </p:nvCxnSpPr>
+        <p:spPr>
+          <a:xfrm>
+            <a:off x="941832" y="5047488"/>
+            <a:ext cx="283463" cy="457200"/>
+          </a:xfrm>
+          <a:prstGeom prst="line">
+            <a:avLst/>
+          </a:prstGeom>
+          <a:ln w="25400">
+            <a:solidFill>
+              <a:srgbClr val="10845B"/>
+            </a:solidFill>
+          </a:ln>
+        </p:spPr>
+        <p:style>
+          <a:lnRef idx="2">
+            <a:schemeClr val="accent1"/>
+          </a:lnRef>
+          <a:fillRef idx="0">
+            <a:schemeClr val="accent1"/>
+          </a:fillRef>
+          <a:effectRef idx="1">
+            <a:schemeClr val="accent1"/>
+          </a:effectRef>
+          <a:fontRef idx="minor">
+            <a:schemeClr val="tx1"/>
+          </a:fontRef>
+        </p:style>
+      </p:cxnSp>
+      <p:sp>
+        <p:nvSpPr>
+          <p:cNvPr id="50" name="TextBox 49"/>
           <p:cNvSpPr txBox="1"/>
           <p:nvPr/>
         </p:nvSpPr>
         <p:spPr>
           <a:xfrm>
-            <a:off x="548640" y="6510528"/>
-            <a:ext cx="10698480" cy="182880"/>
-          </a:xfrm>
-          <a:prstGeom prst="rect">
-            <a:avLst/>
-          </a:prstGeom>
-          <a:noFill/>
-        </p:spPr>
-        <p:txBody>
-          <a:bodyPr wrap="square" anchor="t">
+            <a:off x="365759" y="5577840"/>
+            <a:ext cx="1188720" cy="274320"/>
+          </a:xfrm>
+          <a:prstGeom prst="rect">
+            <a:avLst/>
+          </a:prstGeom>
+          <a:noFill/>
+        </p:spPr>
+        <p:txBody>
+          <a:bodyPr wrap="none" lIns="27432" rIns="27432" tIns="18288" bIns="18288">
             <a:spAutoFit/>
           </a:bodyPr>
           <a:lstStyle/>
           <a:p>
-            <a:pPr algn="l"/>
-            <a:r>
-              <a:rPr sz="800" b="0">
-                <a:solidFill>
-                  <a:srgbClr val="576374"/>
-                </a:solidFill>
-                <a:latin typeface="Aptos"/>
-              </a:rPr>
-              <a:t>Safe Student • Práticas Extensionistas Integradoras VI • Prof. Altemar Sales de Oliveira</a:t>
-            </a:r>
-          </a:p>
-        </p:txBody>
-      </p:sp>
-      <p:sp>
-        <p:nvSpPr>
-          <p:cNvPr id="16" name="TextBox 15"/>
+            <a:pPr algn="ctr"/>
+            <a:r>
+              <a:rPr sz="1000" b="1">
+                <a:solidFill>
+                  <a:srgbClr val="10845B"/>
+                </a:solidFill>
+                <a:latin typeface="Aptos"/>
+              </a:rPr>
+              <a:t>Portaria</a:t>
+            </a:r>
+          </a:p>
+        </p:txBody>
+      </p:sp>
+      <p:sp>
+        <p:nvSpPr>
+          <p:cNvPr id="51" name="Oval 50"/>
+          <p:cNvSpPr/>
+          <p:nvPr/>
+        </p:nvSpPr>
+        <p:spPr>
+          <a:xfrm>
+            <a:off x="11045952" y="3108960"/>
+            <a:ext cx="329184" cy="329184"/>
+          </a:xfrm>
+          <a:prstGeom prst="ellipse">
+            <a:avLst/>
+          </a:prstGeom>
+          <a:noFill/>
+          <a:ln w="25400">
+            <a:solidFill>
+              <a:srgbClr val="B85D00"/>
+            </a:solidFill>
+          </a:ln>
+        </p:spPr>
+        <p:style>
+          <a:lnRef idx="1">
+            <a:schemeClr val="accent1"/>
+          </a:lnRef>
+          <a:fillRef idx="3">
+            <a:schemeClr val="accent1"/>
+          </a:fillRef>
+          <a:effectRef idx="2">
+            <a:schemeClr val="accent1"/>
+          </a:effectRef>
+          <a:fontRef idx="minor">
+            <a:schemeClr val="lt1"/>
+          </a:fontRef>
+        </p:style>
+        <p:txBody>
+          <a:bodyPr rtlCol="0" anchor="ctr"/>
+          <a:lstStyle/>
+          <a:p>
+            <a:pPr algn="ctr"/>
+          </a:p>
+        </p:txBody>
+      </p:sp>
+      <p:cxnSp>
+        <p:nvCxnSpPr>
+          <p:cNvPr id="52" name="Connector 51"/>
+          <p:cNvCxnSpPr/>
+          <p:nvPr/>
+        </p:nvCxnSpPr>
+        <p:spPr>
+          <a:xfrm>
+            <a:off x="11210544" y="3438144"/>
+            <a:ext cx="0" cy="512064"/>
+          </a:xfrm>
+          <a:prstGeom prst="line">
+            <a:avLst/>
+          </a:prstGeom>
+          <a:ln w="25400">
+            <a:solidFill>
+              <a:srgbClr val="B85D00"/>
+            </a:solidFill>
+          </a:ln>
+        </p:spPr>
+        <p:style>
+          <a:lnRef idx="2">
+            <a:schemeClr val="accent1"/>
+          </a:lnRef>
+          <a:fillRef idx="0">
+            <a:schemeClr val="accent1"/>
+          </a:fillRef>
+          <a:effectRef idx="1">
+            <a:schemeClr val="accent1"/>
+          </a:effectRef>
+          <a:fontRef idx="minor">
+            <a:schemeClr val="tx1"/>
+          </a:fontRef>
+        </p:style>
+      </p:cxnSp>
+      <p:cxnSp>
+        <p:nvCxnSpPr>
+          <p:cNvPr id="53" name="Connector 52"/>
+          <p:cNvCxnSpPr/>
+          <p:nvPr/>
+        </p:nvCxnSpPr>
+        <p:spPr>
+          <a:xfrm>
+            <a:off x="10908792" y="3611880"/>
+            <a:ext cx="603504" cy="0"/>
+          </a:xfrm>
+          <a:prstGeom prst="line">
+            <a:avLst/>
+          </a:prstGeom>
+          <a:ln w="25400">
+            <a:solidFill>
+              <a:srgbClr val="B85D00"/>
+            </a:solidFill>
+          </a:ln>
+        </p:spPr>
+        <p:style>
+          <a:lnRef idx="2">
+            <a:schemeClr val="accent1"/>
+          </a:lnRef>
+          <a:fillRef idx="0">
+            <a:schemeClr val="accent1"/>
+          </a:fillRef>
+          <a:effectRef idx="1">
+            <a:schemeClr val="accent1"/>
+          </a:effectRef>
+          <a:fontRef idx="minor">
+            <a:schemeClr val="tx1"/>
+          </a:fontRef>
+        </p:style>
+      </p:cxnSp>
+      <p:cxnSp>
+        <p:nvCxnSpPr>
+          <p:cNvPr id="54" name="Connector 53"/>
+          <p:cNvCxnSpPr/>
+          <p:nvPr/>
+        </p:nvCxnSpPr>
+        <p:spPr>
+          <a:xfrm flipH="1">
+            <a:off x="10927080" y="3950208"/>
+            <a:ext cx="283464" cy="457200"/>
+          </a:xfrm>
+          <a:prstGeom prst="line">
+            <a:avLst/>
+          </a:prstGeom>
+          <a:ln w="25400">
+            <a:solidFill>
+              <a:srgbClr val="B85D00"/>
+            </a:solidFill>
+          </a:ln>
+        </p:spPr>
+        <p:style>
+          <a:lnRef idx="2">
+            <a:schemeClr val="accent1"/>
+          </a:lnRef>
+          <a:fillRef idx="0">
+            <a:schemeClr val="accent1"/>
+          </a:fillRef>
+          <a:effectRef idx="1">
+            <a:schemeClr val="accent1"/>
+          </a:effectRef>
+          <a:fontRef idx="minor">
+            <a:schemeClr val="tx1"/>
+          </a:fontRef>
+        </p:style>
+      </p:cxnSp>
+      <p:cxnSp>
+        <p:nvCxnSpPr>
+          <p:cNvPr id="55" name="Connector 54"/>
+          <p:cNvCxnSpPr/>
+          <p:nvPr/>
+        </p:nvCxnSpPr>
+        <p:spPr>
+          <a:xfrm>
+            <a:off x="11210544" y="3950208"/>
+            <a:ext cx="283464" cy="457200"/>
+          </a:xfrm>
+          <a:prstGeom prst="line">
+            <a:avLst/>
+          </a:prstGeom>
+          <a:ln w="25400">
+            <a:solidFill>
+              <a:srgbClr val="B85D00"/>
+            </a:solidFill>
+          </a:ln>
+        </p:spPr>
+        <p:style>
+          <a:lnRef idx="2">
+            <a:schemeClr val="accent1"/>
+          </a:lnRef>
+          <a:fillRef idx="0">
+            <a:schemeClr val="accent1"/>
+          </a:fillRef>
+          <a:effectRef idx="1">
+            <a:schemeClr val="accent1"/>
+          </a:effectRef>
+          <a:fontRef idx="minor">
+            <a:schemeClr val="tx1"/>
+          </a:fontRef>
+        </p:style>
+      </p:cxnSp>
+      <p:sp>
+        <p:nvSpPr>
+          <p:cNvPr id="56" name="TextBox 55"/>
           <p:cNvSpPr txBox="1"/>
           <p:nvPr/>
         </p:nvSpPr>
         <p:spPr>
           <a:xfrm>
-            <a:off x="11201400" y="6473952"/>
-            <a:ext cx="411480" cy="182880"/>
-          </a:xfrm>
-          <a:prstGeom prst="rect">
-            <a:avLst/>
-          </a:prstGeom>
-          <a:noFill/>
-        </p:spPr>
-        <p:txBody>
-          <a:bodyPr wrap="square" anchor="t">
+            <a:off x="10634472" y="4480560"/>
+            <a:ext cx="1188720" cy="274320"/>
+          </a:xfrm>
+          <a:prstGeom prst="rect">
+            <a:avLst/>
+          </a:prstGeom>
+          <a:noFill/>
+        </p:spPr>
+        <p:txBody>
+          <a:bodyPr wrap="none" lIns="27432" rIns="27432" tIns="18288" bIns="18288">
             <a:spAutoFit/>
           </a:bodyPr>
           <a:lstStyle/>
           <a:p>
-            <a:pPr algn="r"/>
-            <a:r>
-              <a:rPr sz="800" b="0">
-                <a:solidFill>
-                  <a:srgbClr val="576374"/>
-                </a:solidFill>
-                <a:latin typeface="Aptos"/>
-              </a:rPr>
-              <a:t>5</a:t>
+            <a:pPr algn="ctr"/>
+            <a:r>
+              <a:rPr sz="1000" b="1">
+                <a:solidFill>
+                  <a:srgbClr val="B85D00"/>
+                </a:solidFill>
+                <a:latin typeface="Aptos"/>
+              </a:rPr>
+              <a:t>Gestão Escolar</a:t>
+            </a:r>
+          </a:p>
+        </p:txBody>
+      </p:sp>
+      <p:sp>
+        <p:nvSpPr>
+          <p:cNvPr id="57" name="Rounded Rectangle 56"/>
+          <p:cNvSpPr/>
+          <p:nvPr/>
+        </p:nvSpPr>
+        <p:spPr>
+          <a:xfrm>
+            <a:off x="1737360" y="6236208"/>
+            <a:ext cx="8595360" cy="210312"/>
+          </a:xfrm>
+          <a:prstGeom prst="roundRect">
+            <a:avLst/>
+          </a:prstGeom>
+          <a:solidFill>
+            <a:srgbClr val="FFFBEB"/>
+          </a:solidFill>
+          <a:ln w="10160">
+            <a:solidFill>
+              <a:srgbClr val="D6A330"/>
+            </a:solidFill>
+          </a:ln>
+        </p:spPr>
+        <p:style>
+          <a:lnRef idx="1">
+            <a:schemeClr val="accent1"/>
+          </a:lnRef>
+          <a:fillRef idx="3">
+            <a:schemeClr val="accent1"/>
+          </a:fillRef>
+          <a:effectRef idx="2">
+            <a:schemeClr val="accent1"/>
+          </a:effectRef>
+          <a:fontRef idx="minor">
+            <a:schemeClr val="lt1"/>
+          </a:fontRef>
+        </p:style>
+        <p:txBody>
+          <a:bodyPr rtlCol="0" anchor="ctr" lIns="73152" rIns="73152"/>
+          <a:lstStyle/>
+          <a:p>
+            <a:pPr algn="ctr"/>
+            <a:r>
+              <a:rPr sz="640">
+                <a:solidFill>
+                  <a:srgbClr val="785D14"/>
+                </a:solidFill>
+                <a:latin typeface="Aptos"/>
+              </a:rPr>
+              <a:t>Granularidade: entrada/saída fazem parte de “Registrar presença”; relatório/CSV fazem parte de “Acompanhar presença”; marcar como lida faz parte de “Consultar notificações”.</a:t>
             </a:r>
           </a:p>
         </p:txBody>
@@ -7908,7 +9587,7 @@
                 </a:solidFill>
                 <a:latin typeface="Aptos"/>
               </a:rPr>
-              <a:t>Classes, DER e sequência têm responsabilidades diferentes</a:t>
+              <a:t>Classes, modelo lógico e sequência têm responsabilidades diferentes</a:t>
             </a:r>
           </a:p>
         </p:txBody>
@@ -8001,30 +9680,6 @@
           </a:p>
         </p:txBody>
       </p:sp>
-      <p:pic>
-        <p:nvPicPr>
-          <p:cNvPr id="6" name="Picture 5" descr="04_classes_nucleo.png"/>
-          <p:cNvPicPr>
-            <a:picLocks noChangeAspect="1"/>
-          </p:cNvPicPr>
-          <p:nvPr/>
-        </p:nvPicPr>
-        <p:blipFill>
-          <a:blip r:embed="rId2"/>
-          <a:stretch>
-            <a:fillRect/>
-          </a:stretch>
-        </p:blipFill>
-        <p:spPr>
-          <a:xfrm>
-            <a:off x="521208" y="2103120"/>
-            <a:ext cx="3273552" cy="1855013"/>
-          </a:xfrm>
-          <a:prstGeom prst="rect">
-            <a:avLst/>
-          </a:prstGeom>
-        </p:spPr>
-      </p:pic>
       <p:sp>
         <p:nvSpPr>
           <p:cNvPr id="7" name="TextBox 6"/>
@@ -8140,30 +9795,6 @@
           </a:p>
         </p:txBody>
       </p:sp>
-      <p:pic>
-        <p:nvPicPr>
-          <p:cNvPr id="10" name="Picture 9" descr="06_der_nucleo.png"/>
-          <p:cNvPicPr>
-            <a:picLocks noChangeAspect="1"/>
-          </p:cNvPicPr>
-          <p:nvPr/>
-        </p:nvPicPr>
-        <p:blipFill>
-          <a:blip r:embed="rId3"/>
-          <a:stretch>
-            <a:fillRect/>
-          </a:stretch>
-        </p:blipFill>
-        <p:spPr>
-          <a:xfrm>
-            <a:off x="4270248" y="2103120"/>
-            <a:ext cx="3273552" cy="1733164"/>
-          </a:xfrm>
-          <a:prstGeom prst="rect">
-            <a:avLst/>
-          </a:prstGeom>
-        </p:spPr>
-      </p:pic>
       <p:sp>
         <p:nvSpPr>
           <p:cNvPr id="11" name="TextBox 10"/>
@@ -8194,7 +9825,7 @@
                 </a:solidFill>
                 <a:latin typeface="Aptos"/>
               </a:rPr>
-              <a:t>DER lógico</a:t>
+              <a:t>Modelo lógico</a:t>
             </a:r>
           </a:p>
         </p:txBody>
@@ -8229,7 +9860,7 @@
                 </a:solidFill>
                 <a:latin typeface="Aptos"/>
               </a:rPr>
-              <a:t>PK/FK/UQ e cardinalidades; relacionamentos sem setas de processo.</a:t>
+              <a:t>Tabelas, PK/FK/UQ, CHECKs e cardinalidades; sem setas de processo.</a:t>
             </a:r>
           </a:p>
         </p:txBody>
@@ -8279,170 +9910,218 @@
           </a:p>
         </p:txBody>
       </p:sp>
+      <p:sp>
+        <p:nvSpPr>
+          <p:cNvPr id="15" name="TextBox 14"/>
+          <p:cNvSpPr txBox="1"/>
+          <p:nvPr/>
+        </p:nvSpPr>
+        <p:spPr>
+          <a:xfrm>
+            <a:off x="8074152" y="5394960"/>
+            <a:ext cx="3154680" cy="237744"/>
+          </a:xfrm>
+          <a:prstGeom prst="rect">
+            <a:avLst/>
+          </a:prstGeom>
+          <a:noFill/>
+        </p:spPr>
+        <p:txBody>
+          <a:bodyPr wrap="square" anchor="t">
+            <a:spAutoFit/>
+          </a:bodyPr>
+          <a:lstStyle/>
+          <a:p>
+            <a:pPr algn="ctr"/>
+            <a:r>
+              <a:rPr sz="1200" b="1">
+                <a:solidFill>
+                  <a:srgbClr val="142A4A"/>
+                </a:solidFill>
+                <a:latin typeface="Aptos"/>
+              </a:rPr>
+              <a:t>Sequência</a:t>
+            </a:r>
+          </a:p>
+        </p:txBody>
+      </p:sp>
+      <p:sp>
+        <p:nvSpPr>
+          <p:cNvPr id="16" name="TextBox 15"/>
+          <p:cNvSpPr txBox="1"/>
+          <p:nvPr/>
+        </p:nvSpPr>
+        <p:spPr>
+          <a:xfrm>
+            <a:off x="8092440" y="5669280"/>
+            <a:ext cx="3108960" cy="384048"/>
+          </a:xfrm>
+          <a:prstGeom prst="rect">
+            <a:avLst/>
+          </a:prstGeom>
+          <a:noFill/>
+        </p:spPr>
+        <p:txBody>
+          <a:bodyPr wrap="square" anchor="t">
+            <a:spAutoFit/>
+          </a:bodyPr>
+          <a:lstStyle/>
+          <a:p>
+            <a:pPr algn="ctr"/>
+            <a:r>
+              <a:rPr sz="950" b="0">
+                <a:solidFill>
+                  <a:srgbClr val="576374"/>
+                </a:solidFill>
+                <a:latin typeface="Aptos"/>
+              </a:rPr>
+              <a:t>Setas representam mensagens; retornos são tracejados.</a:t>
+            </a:r>
+          </a:p>
+        </p:txBody>
+      </p:sp>
+      <p:sp>
+        <p:nvSpPr>
+          <p:cNvPr id="17" name="TextBox 16"/>
+          <p:cNvSpPr txBox="1"/>
+          <p:nvPr/>
+        </p:nvSpPr>
+        <p:spPr>
+          <a:xfrm>
+            <a:off x="548640" y="6510528"/>
+            <a:ext cx="10698480" cy="182880"/>
+          </a:xfrm>
+          <a:prstGeom prst="rect">
+            <a:avLst/>
+          </a:prstGeom>
+          <a:noFill/>
+        </p:spPr>
+        <p:txBody>
+          <a:bodyPr wrap="square" anchor="t">
+            <a:spAutoFit/>
+          </a:bodyPr>
+          <a:lstStyle/>
+          <a:p>
+            <a:pPr algn="l"/>
+            <a:r>
+              <a:rPr sz="800" b="0">
+                <a:solidFill>
+                  <a:srgbClr val="576374"/>
+                </a:solidFill>
+                <a:latin typeface="Aptos"/>
+              </a:rPr>
+              <a:t>Safe Student • Práticas Extensionistas Integradoras VI • Prof. Altemar Sales de Oliveira</a:t>
+            </a:r>
+          </a:p>
+        </p:txBody>
+      </p:sp>
+      <p:sp>
+        <p:nvSpPr>
+          <p:cNvPr id="18" name="TextBox 17"/>
+          <p:cNvSpPr txBox="1"/>
+          <p:nvPr/>
+        </p:nvSpPr>
+        <p:spPr>
+          <a:xfrm>
+            <a:off x="11201400" y="6473952"/>
+            <a:ext cx="411480" cy="182880"/>
+          </a:xfrm>
+          <a:prstGeom prst="rect">
+            <a:avLst/>
+          </a:prstGeom>
+          <a:noFill/>
+        </p:spPr>
+        <p:txBody>
+          <a:bodyPr wrap="square" anchor="t">
+            <a:spAutoFit/>
+          </a:bodyPr>
+          <a:lstStyle/>
+          <a:p>
+            <a:pPr algn="r"/>
+            <a:r>
+              <a:rPr sz="800" b="0">
+                <a:solidFill>
+                  <a:srgbClr val="576374"/>
+                </a:solidFill>
+                <a:latin typeface="Aptos"/>
+              </a:rPr>
+              <a:t>6</a:t>
+            </a:r>
+          </a:p>
+        </p:txBody>
+      </p:sp>
       <p:pic>
         <p:nvPicPr>
-          <p:cNvPr id="14" name="Picture 13" descr="08_sequencia_presenca.png"/>
+          <p:cNvPr id="19" name="Picture 18" descr="image2.png"/>
           <p:cNvPicPr>
             <a:picLocks noChangeAspect="1"/>
           </p:cNvPicPr>
           <p:nvPr/>
         </p:nvPicPr>
         <p:blipFill>
-          <a:blip r:embed="rId4"/>
+          <a:blip r:embed="rId5"/>
           <a:stretch>
             <a:fillRect/>
           </a:stretch>
         </p:blipFill>
         <p:spPr>
           <a:xfrm>
-            <a:off x="8019288" y="2103120"/>
-            <a:ext cx="3273552" cy="1900479"/>
+            <a:off x="521207" y="2345452"/>
+            <a:ext cx="3273552" cy="1911062"/>
           </a:xfrm>
           <a:prstGeom prst="rect">
             <a:avLst/>
           </a:prstGeom>
         </p:spPr>
       </p:pic>
-      <p:sp>
-        <p:nvSpPr>
-          <p:cNvPr id="15" name="TextBox 14"/>
-          <p:cNvSpPr txBox="1"/>
-          <p:nvPr/>
-        </p:nvSpPr>
-        <p:spPr>
-          <a:xfrm>
-            <a:off x="8074152" y="5394960"/>
-            <a:ext cx="3154680" cy="237744"/>
-          </a:xfrm>
-          <a:prstGeom prst="rect">
-            <a:avLst/>
-          </a:prstGeom>
-          <a:noFill/>
-        </p:spPr>
-        <p:txBody>
-          <a:bodyPr wrap="square" anchor="t">
-            <a:spAutoFit/>
-          </a:bodyPr>
-          <a:lstStyle/>
-          <a:p>
-            <a:pPr algn="ctr"/>
-            <a:r>
-              <a:rPr sz="1200" b="1">
-                <a:solidFill>
-                  <a:srgbClr val="142A4A"/>
-                </a:solidFill>
-                <a:latin typeface="Aptos"/>
-              </a:rPr>
-              <a:t>Sequência</a:t>
-            </a:r>
-          </a:p>
-        </p:txBody>
-      </p:sp>
-      <p:sp>
-        <p:nvSpPr>
-          <p:cNvPr id="16" name="TextBox 15"/>
-          <p:cNvSpPr txBox="1"/>
-          <p:nvPr/>
-        </p:nvSpPr>
-        <p:spPr>
-          <a:xfrm>
-            <a:off x="8092440" y="5669280"/>
-            <a:ext cx="3108960" cy="384048"/>
-          </a:xfrm>
-          <a:prstGeom prst="rect">
-            <a:avLst/>
-          </a:prstGeom>
-          <a:noFill/>
-        </p:spPr>
-        <p:txBody>
-          <a:bodyPr wrap="square" anchor="t">
-            <a:spAutoFit/>
-          </a:bodyPr>
-          <a:lstStyle/>
-          <a:p>
-            <a:pPr algn="ctr"/>
-            <a:r>
-              <a:rPr sz="950" b="0">
-                <a:solidFill>
-                  <a:srgbClr val="576374"/>
-                </a:solidFill>
-                <a:latin typeface="Aptos"/>
-              </a:rPr>
-              <a:t>Setas representam mensagens; retornos são tracejados.</a:t>
-            </a:r>
-          </a:p>
-        </p:txBody>
-      </p:sp>
-      <p:sp>
-        <p:nvSpPr>
-          <p:cNvPr id="17" name="TextBox 16"/>
-          <p:cNvSpPr txBox="1"/>
-          <p:nvPr/>
-        </p:nvSpPr>
-        <p:spPr>
-          <a:xfrm>
-            <a:off x="548640" y="6510528"/>
-            <a:ext cx="10698480" cy="182880"/>
-          </a:xfrm>
-          <a:prstGeom prst="rect">
-            <a:avLst/>
-          </a:prstGeom>
-          <a:noFill/>
-        </p:spPr>
-        <p:txBody>
-          <a:bodyPr wrap="square" anchor="t">
-            <a:spAutoFit/>
-          </a:bodyPr>
-          <a:lstStyle/>
-          <a:p>
-            <a:pPr algn="l"/>
-            <a:r>
-              <a:rPr sz="800" b="0">
-                <a:solidFill>
-                  <a:srgbClr val="576374"/>
-                </a:solidFill>
-                <a:latin typeface="Aptos"/>
-              </a:rPr>
-              <a:t>Safe Student • Práticas Extensionistas Integradoras VI • Prof. Altemar Sales de Oliveira</a:t>
-            </a:r>
-          </a:p>
-        </p:txBody>
-      </p:sp>
-      <p:sp>
-        <p:nvSpPr>
-          <p:cNvPr id="18" name="TextBox 17"/>
-          <p:cNvSpPr txBox="1"/>
-          <p:nvPr/>
-        </p:nvSpPr>
-        <p:spPr>
-          <a:xfrm>
-            <a:off x="11201400" y="6473952"/>
-            <a:ext cx="411480" cy="182880"/>
-          </a:xfrm>
-          <a:prstGeom prst="rect">
-            <a:avLst/>
-          </a:prstGeom>
-          <a:noFill/>
-        </p:spPr>
-        <p:txBody>
-          <a:bodyPr wrap="square" anchor="t">
-            <a:spAutoFit/>
-          </a:bodyPr>
-          <a:lstStyle/>
-          <a:p>
-            <a:pPr algn="r"/>
-            <a:r>
-              <a:rPr sz="800" b="0">
-                <a:solidFill>
-                  <a:srgbClr val="576374"/>
-                </a:solidFill>
-                <a:latin typeface="Aptos"/>
-              </a:rPr>
-              <a:t>6</a:t>
-            </a:r>
-          </a:p>
-        </p:txBody>
-      </p:sp>
+      <p:pic>
+        <p:nvPicPr>
+          <p:cNvPr id="20" name="Picture 19" descr="image4.png"/>
+          <p:cNvPicPr>
+            <a:picLocks noChangeAspect="1"/>
+          </p:cNvPicPr>
+          <p:nvPr/>
+        </p:nvPicPr>
+        <p:blipFill>
+          <a:blip r:embed="rId6"/>
+          <a:stretch>
+            <a:fillRect/>
+          </a:stretch>
+        </p:blipFill>
+        <p:spPr>
+          <a:xfrm>
+            <a:off x="4715596" y="2039112"/>
+            <a:ext cx="2382855" cy="2505456"/>
+          </a:xfrm>
+          <a:prstGeom prst="rect">
+            <a:avLst/>
+          </a:prstGeom>
+        </p:spPr>
+      </p:pic>
+      <p:pic>
+        <p:nvPicPr>
+          <p:cNvPr id="21" name="Picture 20" descr="image6.png"/>
+          <p:cNvPicPr>
+            <a:picLocks noChangeAspect="1"/>
+          </p:cNvPicPr>
+          <p:nvPr/>
+        </p:nvPicPr>
+        <p:blipFill>
+          <a:blip r:embed="rId7"/>
+          <a:stretch>
+            <a:fillRect/>
+          </a:stretch>
+        </p:blipFill>
+        <p:spPr>
+          <a:xfrm>
+            <a:off x="8081738" y="2039112"/>
+            <a:ext cx="3148651" cy="2505456"/>
+          </a:xfrm>
+          <a:prstGeom prst="rect">
+            <a:avLst/>
+          </a:prstGeom>
+        </p:spPr>
+      </p:pic>
     </p:spTree>
   </p:cSld>
   <p:clrMapOvr>
@@ -8574,30 +10253,6 @@
           </a:p>
         </p:txBody>
       </p:sp>
-      <p:pic>
-        <p:nvPicPr>
-          <p:cNvPr id="5" name="Picture 4" descr="09_arquitetura_componentes.png"/>
-          <p:cNvPicPr>
-            <a:picLocks noChangeAspect="1"/>
-          </p:cNvPicPr>
-          <p:nvPr/>
-        </p:nvPicPr>
-        <p:blipFill>
-          <a:blip r:embed="rId2"/>
-          <a:stretch>
-            <a:fillRect/>
-          </a:stretch>
-        </p:blipFill>
-        <p:spPr>
-          <a:xfrm>
-            <a:off x="594360" y="1965960"/>
-            <a:ext cx="6400800" cy="3179064"/>
-          </a:xfrm>
-          <a:prstGeom prst="rect">
-            <a:avLst/>
-          </a:prstGeom>
-        </p:spPr>
-      </p:pic>
       <p:sp>
         <p:nvSpPr>
           <p:cNvPr id="6" name="Rounded Rectangle 5"/>
@@ -8716,7 +10371,7 @@
                 </a:solidFill>
                 <a:latin typeface="Aptos"/>
               </a:rPr>
-              <a:t>Privacidade V2</a:t>
+              <a:t>Privacidade no MVP</a:t>
             </a:r>
           </a:p>
         </p:txBody>
@@ -9142,6 +10797,30 @@
           </a:p>
         </p:txBody>
       </p:sp>
+      <p:pic>
+        <p:nvPicPr>
+          <p:cNvPr id="20" name="Picture 19" descr="image7.png"/>
+          <p:cNvPicPr>
+            <a:picLocks noChangeAspect="1"/>
+          </p:cNvPicPr>
+          <p:nvPr/>
+        </p:nvPicPr>
+        <p:blipFill>
+          <a:blip r:embed="rId3"/>
+          <a:stretch>
+            <a:fillRect/>
+          </a:stretch>
+        </p:blipFill>
+        <p:spPr>
+          <a:xfrm>
+            <a:off x="839458" y="1965960"/>
+            <a:ext cx="5910603" cy="3182112"/>
+          </a:xfrm>
+          <a:prstGeom prst="rect">
+            <a:avLst/>
+          </a:prstGeom>
+        </p:spPr>
+      </p:pic>
     </p:spTree>
   </p:cSld>
   <p:clrMapOvr>
@@ -9225,7 +10904,7 @@
                 </a:solidFill>
                 <a:latin typeface="Aptos"/>
               </a:rPr>
-              <a:t>Suíte V2: domínio, segurança, API e regressões de privacidade</a:t>
+              <a:t>Suíte de testes: domínio, segurança, API e regressões de privacidade</a:t>
             </a:r>
           </a:p>
         </p:txBody>
@@ -10596,7 +12275,7 @@
                 </a:solidFill>
                 <a:latin typeface="Aptos"/>
               </a:rPr>
-              <a:t>Instrumentos, perfis, protocolo de validação e resultados históricos declarados em versão anterior.</a:t>
+              <a:t>Instrumentos, perfis, protocolo de validação e resultados históricos declarados em artefatos anteriores.</a:t>
             </a:r>
           </a:p>
         </p:txBody>
